--- a/writing/decks/05-draft-check-sign-off.pptx
+++ b/writing/decks/05-draft-check-sign-off.pptx
@@ -21,6 +21,7 @@
     <p:sldId id="269" r:id="rId20"/>
     <p:sldId id="270" r:id="rId21"/>
     <p:sldId id="271" r:id="rId22"/>
+    <p:sldId id="272" r:id="rId23"/>
   </p:sldIdLst>
   <p:sldSz cx="12191695" cy="6858000" type="screen4x3"/>
   <p:notesSz cx="6858000" cy="9144000"/>
@@ -3566,6 +3567,389 @@
 </file>
 
 <file path=ppt/slides/slide10.xml><?xml version="1.0" encoding="utf-8"?>
+<p:sld xmlns:a="http://schemas.openxmlformats.org/drawingml/2006/main" xmlns:p="http://schemas.openxmlformats.org/presentationml/2006/main" xmlns:r="http://schemas.openxmlformats.org/officeDocument/2006/relationships">
+  <p:cSld>
+    <p:spTree>
+      <p:nvGrpSpPr>
+        <p:cNvPr id="1" name=""/>
+        <p:cNvGrpSpPr/>
+        <p:nvPr/>
+      </p:nvGrpSpPr>
+      <p:grpSpPr/>
+      <p:sp>
+        <p:nvSpPr>
+          <p:cNvPr id="2" name="Rectangle 1"/>
+          <p:cNvSpPr/>
+          <p:nvPr/>
+        </p:nvSpPr>
+        <p:spPr>
+          <a:xfrm>
+            <a:off x="0" y="0"/>
+            <a:ext cx="12191695" cy="6858000"/>
+          </a:xfrm>
+          <a:prstGeom prst="rect">
+            <a:avLst/>
+          </a:prstGeom>
+          <a:solidFill>
+            <a:srgbClr val="F6F5F2"/>
+          </a:solidFill>
+          <a:ln>
+            <a:noFill/>
+          </a:ln>
+          <a:effectLst/>
+        </p:spPr>
+        <p:style>
+          <a:lnRef idx="1">
+            <a:schemeClr val="accent1"/>
+          </a:lnRef>
+          <a:fillRef idx="3">
+            <a:schemeClr val="accent1"/>
+          </a:fillRef>
+          <a:effectRef idx="2">
+            <a:schemeClr val="accent1"/>
+          </a:effectRef>
+          <a:fontRef idx="minor">
+            <a:schemeClr val="lt1"/>
+          </a:fontRef>
+        </p:style>
+        <p:txBody>
+          <a:bodyPr rtlCol="0" anchor="ctr"/>
+          <a:lstStyle/>
+          <a:p>
+            <a:pPr algn="ctr"/>
+          </a:p>
+        </p:txBody>
+      </p:sp>
+      <p:sp>
+        <p:nvSpPr>
+          <p:cNvPr id="3" name="TextBox 2"/>
+          <p:cNvSpPr txBox="1"/>
+          <p:nvPr/>
+        </p:nvSpPr>
+        <p:spPr>
+          <a:xfrm>
+            <a:off x="640080" y="384048"/>
+            <a:ext cx="10881360" cy="320040"/>
+          </a:xfrm>
+          <a:prstGeom prst="rect">
+            <a:avLst/>
+          </a:prstGeom>
+          <a:noFill/>
+        </p:spPr>
+        <p:txBody>
+          <a:bodyPr wrap="square" anchor="t" lIns="0" rIns="0" tIns="0" bIns="0">
+            <a:noAutofit/>
+          </a:bodyPr>
+          <a:lstStyle/>
+          <a:p>
+            <a:r>
+              <a:rPr sz="1300" b="1" i="0">
+                <a:solidFill>
+                  <a:srgbClr val="3D6D7E"/>
+                </a:solidFill>
+                <a:latin typeface="Consolas"/>
+              </a:rPr>
+              <a:t>CHECK-DESIGN-DOC</a:t>
+            </a:r>
+          </a:p>
+        </p:txBody>
+      </p:sp>
+      <p:sp>
+        <p:nvSpPr>
+          <p:cNvPr id="4" name="TextBox 3"/>
+          <p:cNvSpPr txBox="1"/>
+          <p:nvPr/>
+        </p:nvSpPr>
+        <p:spPr>
+          <a:xfrm>
+            <a:off x="640080" y="713232"/>
+            <a:ext cx="10881360" cy="1371600"/>
+          </a:xfrm>
+          <a:prstGeom prst="rect">
+            <a:avLst/>
+          </a:prstGeom>
+          <a:noFill/>
+        </p:spPr>
+        <p:txBody>
+          <a:bodyPr wrap="square" anchor="t" lIns="0" rIns="0" tIns="0" bIns="0">
+            <a:noAutofit/>
+          </a:bodyPr>
+          <a:lstStyle/>
+          <a:p>
+            <a:pPr>
+              <a:lnSpc>
+                <a:spcPct val="105000"/>
+              </a:lnSpc>
+            </a:pPr>
+            <a:r>
+              <a:rPr sz="3200" b="1" i="0">
+                <a:solidFill>
+                  <a:srgbClr val="1C1E22"/>
+                </a:solidFill>
+                <a:latin typeface="Georgia"/>
+              </a:rPr>
+              <a:t>Mirrors DECOMPOSE → AUDIT → RECONCILE, one layer earlier</a:t>
+            </a:r>
+          </a:p>
+        </p:txBody>
+      </p:sp>
+      <p:cxnSp>
+        <p:nvCxnSpPr>
+          <p:cNvPr id="5" name="Connector 4"/>
+          <p:cNvCxnSpPr/>
+          <p:nvPr/>
+        </p:nvCxnSpPr>
+        <p:spPr>
+          <a:xfrm>
+            <a:off x="640080" y="1691640"/>
+            <a:ext cx="10881360" cy="0"/>
+          </a:xfrm>
+          <a:prstGeom prst="line">
+            <a:avLst/>
+          </a:prstGeom>
+          <a:ln w="12700">
+            <a:solidFill>
+              <a:srgbClr val="E2E0DA"/>
+            </a:solidFill>
+          </a:ln>
+        </p:spPr>
+        <p:style>
+          <a:lnRef idx="2">
+            <a:schemeClr val="accent1"/>
+          </a:lnRef>
+          <a:fillRef idx="0">
+            <a:schemeClr val="accent1"/>
+          </a:fillRef>
+          <a:effectRef idx="1">
+            <a:schemeClr val="accent1"/>
+          </a:effectRef>
+          <a:fontRef idx="minor">
+            <a:schemeClr val="tx1"/>
+          </a:fontRef>
+        </p:style>
+      </p:cxnSp>
+      <p:sp>
+        <p:nvSpPr>
+          <p:cNvPr id="6" name="TextBox 5"/>
+          <p:cNvSpPr txBox="1"/>
+          <p:nvPr/>
+        </p:nvSpPr>
+        <p:spPr>
+          <a:xfrm>
+            <a:off x="640080" y="1965960"/>
+            <a:ext cx="10881360" cy="4206240"/>
+          </a:xfrm>
+          <a:prstGeom prst="rect">
+            <a:avLst/>
+          </a:prstGeom>
+          <a:noFill/>
+        </p:spPr>
+        <p:txBody>
+          <a:bodyPr wrap="square" anchor="t" lIns="0" rIns="0" tIns="0" bIns="0">
+            <a:noAutofit/>
+          </a:bodyPr>
+          <a:lstStyle/>
+          <a:p>
+            <a:pPr>
+              <a:lnSpc>
+                <a:spcPct val="112000"/>
+              </a:lnSpc>
+              <a:spcAft>
+                <a:spcPts val="1000"/>
+              </a:spcAft>
+            </a:pPr>
+            <a:r>
+              <a:rPr sz="1600" b="1" i="0">
+                <a:solidFill>
+                  <a:srgbClr val="3D6D7E"/>
+                </a:solidFill>
+                <a:latin typeface="Calibri"/>
+              </a:rPr>
+              <a:t>—  </a:t>
+            </a:r>
+            <a:r>
+              <a:rPr sz="1600" b="0" i="0">
+                <a:solidFill>
+                  <a:srgbClr val="1C1E22"/>
+                </a:solidFill>
+                <a:latin typeface="Calibri"/>
+              </a:rPr>
+              <a:t>Runs the mechanical scan first, keeps every path:line hit.</a:t>
+            </a:r>
+          </a:p>
+          <a:p>
+            <a:pPr>
+              <a:lnSpc>
+                <a:spcPct val="112000"/>
+              </a:lnSpc>
+              <a:spcAft>
+                <a:spcPts val="1000"/>
+              </a:spcAft>
+            </a:pPr>
+            <a:r>
+              <a:rPr sz="1600" b="1" i="0">
+                <a:solidFill>
+                  <a:srgbClr val="3D6D7E"/>
+                </a:solidFill>
+                <a:latin typeface="Calibri"/>
+              </a:rPr>
+              <a:t>—  </a:t>
+            </a:r>
+            <a:r>
+              <a:rPr sz="1600" b="0" i="0">
+                <a:solidFill>
+                  <a:srgbClr val="1C1E22"/>
+                </a:solidFill>
+                <a:latin typeface="Calibri"/>
+              </a:rPr>
+              <a:t>Separately dispatches a fresh subagent with nothing but the doc and the current checklist — not the mechanical report, not who wrote the doc or why. Feeding the mechanical hits in first would anchor its judgment and defeat the point of a second, independent pass.</a:t>
+            </a:r>
+          </a:p>
+          <a:p>
+            <a:pPr>
+              <a:lnSpc>
+                <a:spcPct val="112000"/>
+              </a:lnSpc>
+              <a:spcAft>
+                <a:spcPts val="1000"/>
+              </a:spcAft>
+            </a:pPr>
+            <a:r>
+              <a:rPr sz="1600" b="1" i="0">
+                <a:solidFill>
+                  <a:srgbClr val="3D6D7E"/>
+                </a:solidFill>
+                <a:latin typeface="Calibri"/>
+              </a:rPr>
+              <a:t>—  </a:t>
+            </a:r>
+            <a:r>
+              <a:rPr sz="1600" b="0" i="0">
+                <a:solidFill>
+                  <a:srgbClr val="1C1E22"/>
+                </a:solidFill>
+                <a:latin typeface="Calibri"/>
+              </a:rPr>
+              <a:t>The subagent is explicitly told that finding nothing is an acceptable result — manufacturing findings to look thorough is its own kind of failure.</a:t>
+            </a:r>
+          </a:p>
+        </p:txBody>
+      </p:sp>
+      <p:sp>
+        <p:nvSpPr>
+          <p:cNvPr id="7" name="TextBox 6"/>
+          <p:cNvSpPr txBox="1"/>
+          <p:nvPr/>
+        </p:nvSpPr>
+        <p:spPr>
+          <a:xfrm>
+            <a:off x="640080" y="6473952"/>
+            <a:ext cx="10881360" cy="292608"/>
+          </a:xfrm>
+          <a:prstGeom prst="rect">
+            <a:avLst/>
+          </a:prstGeom>
+          <a:noFill/>
+        </p:spPr>
+        <p:txBody>
+          <a:bodyPr wrap="square" anchor="t" lIns="0" rIns="0" tIns="0" bIns="0">
+            <a:noAutofit/>
+          </a:bodyPr>
+          <a:lstStyle/>
+          <a:p>
+            <a:pPr algn="l"/>
+            <a:r>
+              <a:rPr sz="1000" b="0" i="0">
+                <a:solidFill>
+                  <a:srgbClr val="5F636B"/>
+                </a:solidFill>
+                <a:latin typeface="Consolas"/>
+              </a:rPr>
+              <a:t>RATCHET · PART 5/6 · DRAFT, CHECK, SIGN OFF</a:t>
+            </a:r>
+          </a:p>
+          <a:p/>
+        </p:txBody>
+      </p:sp>
+      <p:sp>
+        <p:nvSpPr>
+          <p:cNvPr id="8" name="TextBox 7"/>
+          <p:cNvSpPr txBox="1"/>
+          <p:nvPr/>
+        </p:nvSpPr>
+        <p:spPr>
+          <a:xfrm>
+            <a:off x="10881360" y="6473952"/>
+            <a:ext cx="640080" cy="292608"/>
+          </a:xfrm>
+          <a:prstGeom prst="rect">
+            <a:avLst/>
+          </a:prstGeom>
+          <a:noFill/>
+        </p:spPr>
+        <p:txBody>
+          <a:bodyPr wrap="square" anchor="t" lIns="0" rIns="0" tIns="0" bIns="0">
+            <a:noAutofit/>
+          </a:bodyPr>
+          <a:lstStyle/>
+          <a:p>
+            <a:pPr algn="r"/>
+            <a:r>
+              <a:rPr sz="1000" b="0" i="0">
+                <a:solidFill>
+                  <a:srgbClr val="5F636B"/>
+                </a:solidFill>
+                <a:latin typeface="Consolas"/>
+              </a:rPr>
+              <a:t>10 / 17</a:t>
+            </a:r>
+          </a:p>
+        </p:txBody>
+      </p:sp>
+      <p:cxnSp>
+        <p:nvCxnSpPr>
+          <p:cNvPr id="9" name="Connector 8"/>
+          <p:cNvCxnSpPr/>
+          <p:nvPr/>
+        </p:nvCxnSpPr>
+        <p:spPr>
+          <a:xfrm>
+            <a:off x="640080" y="6400800"/>
+            <a:ext cx="10881360" cy="0"/>
+          </a:xfrm>
+          <a:prstGeom prst="line">
+            <a:avLst/>
+          </a:prstGeom>
+          <a:ln w="12700">
+            <a:solidFill>
+              <a:srgbClr val="E2E0DA"/>
+            </a:solidFill>
+          </a:ln>
+        </p:spPr>
+        <p:style>
+          <a:lnRef idx="2">
+            <a:schemeClr val="accent1"/>
+          </a:lnRef>
+          <a:fillRef idx="0">
+            <a:schemeClr val="accent1"/>
+          </a:fillRef>
+          <a:effectRef idx="1">
+            <a:schemeClr val="accent1"/>
+          </a:effectRef>
+          <a:fontRef idx="minor">
+            <a:schemeClr val="tx1"/>
+          </a:fontRef>
+        </p:style>
+      </p:cxnSp>
+    </p:spTree>
+  </p:cSld>
+  <p:clrMapOvr>
+    <a:masterClrMapping/>
+  </p:clrMapOvr>
+</p:sld>
+</file>
+
+<file path=ppt/slides/slide11.xml><?xml version="1.0" encoding="utf-8"?>
 <p:sld xmlns:a="http://schemas.openxmlformats.org/drawingml/2006/main" xmlns:p="http://schemas.openxmlformats.org/presentationml/2006/main" xmlns:r="http://schemas.openxmlformats.org/officeDocument/2006/relationships">
   <p:cSld>
     <p:spTree>
@@ -4160,390 +4544,7 @@
                 </a:solidFill>
                 <a:latin typeface="Consolas"/>
               </a:rPr>
-              <a:t>10 / 16</a:t>
-            </a:r>
-          </a:p>
-        </p:txBody>
-      </p:sp>
-      <p:cxnSp>
-        <p:nvCxnSpPr>
-          <p:cNvPr id="9" name="Connector 8"/>
-          <p:cNvCxnSpPr/>
-          <p:nvPr/>
-        </p:nvCxnSpPr>
-        <p:spPr>
-          <a:xfrm>
-            <a:off x="640080" y="6400800"/>
-            <a:ext cx="10881360" cy="0"/>
-          </a:xfrm>
-          <a:prstGeom prst="line">
-            <a:avLst/>
-          </a:prstGeom>
-          <a:ln w="12700">
-            <a:solidFill>
-              <a:srgbClr val="E2E0DA"/>
-            </a:solidFill>
-          </a:ln>
-        </p:spPr>
-        <p:style>
-          <a:lnRef idx="2">
-            <a:schemeClr val="accent1"/>
-          </a:lnRef>
-          <a:fillRef idx="0">
-            <a:schemeClr val="accent1"/>
-          </a:fillRef>
-          <a:effectRef idx="1">
-            <a:schemeClr val="accent1"/>
-          </a:effectRef>
-          <a:fontRef idx="minor">
-            <a:schemeClr val="tx1"/>
-          </a:fontRef>
-        </p:style>
-      </p:cxnSp>
-    </p:spTree>
-  </p:cSld>
-  <p:clrMapOvr>
-    <a:masterClrMapping/>
-  </p:clrMapOvr>
-</p:sld>
-</file>
-
-<file path=ppt/slides/slide11.xml><?xml version="1.0" encoding="utf-8"?>
-<p:sld xmlns:a="http://schemas.openxmlformats.org/drawingml/2006/main" xmlns:p="http://schemas.openxmlformats.org/presentationml/2006/main" xmlns:r="http://schemas.openxmlformats.org/officeDocument/2006/relationships">
-  <p:cSld>
-    <p:spTree>
-      <p:nvGrpSpPr>
-        <p:cNvPr id="1" name=""/>
-        <p:cNvGrpSpPr/>
-        <p:nvPr/>
-      </p:nvGrpSpPr>
-      <p:grpSpPr/>
-      <p:sp>
-        <p:nvSpPr>
-          <p:cNvPr id="2" name="Rectangle 1"/>
-          <p:cNvSpPr/>
-          <p:nvPr/>
-        </p:nvSpPr>
-        <p:spPr>
-          <a:xfrm>
-            <a:off x="0" y="0"/>
-            <a:ext cx="12191695" cy="6858000"/>
-          </a:xfrm>
-          <a:prstGeom prst="rect">
-            <a:avLst/>
-          </a:prstGeom>
-          <a:solidFill>
-            <a:srgbClr val="F6F5F2"/>
-          </a:solidFill>
-          <a:ln>
-            <a:noFill/>
-          </a:ln>
-          <a:effectLst/>
-        </p:spPr>
-        <p:style>
-          <a:lnRef idx="1">
-            <a:schemeClr val="accent1"/>
-          </a:lnRef>
-          <a:fillRef idx="3">
-            <a:schemeClr val="accent1"/>
-          </a:fillRef>
-          <a:effectRef idx="2">
-            <a:schemeClr val="accent1"/>
-          </a:effectRef>
-          <a:fontRef idx="minor">
-            <a:schemeClr val="lt1"/>
-          </a:fontRef>
-        </p:style>
-        <p:txBody>
-          <a:bodyPr rtlCol="0" anchor="ctr"/>
-          <a:lstStyle/>
-          <a:p>
-            <a:pPr algn="ctr"/>
-          </a:p>
-        </p:txBody>
-      </p:sp>
-      <p:sp>
-        <p:nvSpPr>
-          <p:cNvPr id="3" name="TextBox 2"/>
-          <p:cNvSpPr txBox="1"/>
-          <p:nvPr/>
-        </p:nvSpPr>
-        <p:spPr>
-          <a:xfrm>
-            <a:off x="640080" y="384048"/>
-            <a:ext cx="10881360" cy="320040"/>
-          </a:xfrm>
-          <a:prstGeom prst="rect">
-            <a:avLst/>
-          </a:prstGeom>
-          <a:noFill/>
-        </p:spPr>
-        <p:txBody>
-          <a:bodyPr wrap="square" anchor="t" lIns="0" rIns="0" tIns="0" bIns="0">
-            <a:noAutofit/>
-          </a:bodyPr>
-          <a:lstStyle/>
-          <a:p>
-            <a:r>
-              <a:rPr sz="1300" b="1" i="0">
-                <a:solidFill>
-                  <a:srgbClr val="3D6D7E"/>
-                </a:solidFill>
-                <a:latin typeface="Consolas"/>
-              </a:rPr>
-              <a:t>SIGN-OFF</a:t>
-            </a:r>
-          </a:p>
-        </p:txBody>
-      </p:sp>
-      <p:sp>
-        <p:nvSpPr>
-          <p:cNvPr id="4" name="TextBox 3"/>
-          <p:cNvSpPr txBox="1"/>
-          <p:nvPr/>
-        </p:nvSpPr>
-        <p:spPr>
-          <a:xfrm>
-            <a:off x="640080" y="713232"/>
-            <a:ext cx="10881360" cy="1371600"/>
-          </a:xfrm>
-          <a:prstGeom prst="rect">
-            <a:avLst/>
-          </a:prstGeom>
-          <a:noFill/>
-        </p:spPr>
-        <p:txBody>
-          <a:bodyPr wrap="square" anchor="t" lIns="0" rIns="0" tIns="0" bIns="0">
-            <a:noAutofit/>
-          </a:bodyPr>
-          <a:lstStyle/>
-          <a:p>
-            <a:pPr>
-              <a:lnSpc>
-                <a:spcPct val="105000"/>
-              </a:lnSpc>
-            </a:pPr>
-            <a:r>
-              <a:rPr sz="3200" b="1" i="0">
-                <a:solidFill>
-                  <a:srgbClr val="1C1E22"/>
-                </a:solidFill>
-                <a:latin typeface="Georgia"/>
-              </a:rPr>
-              <a:t>Every row starts as "needs decision"</a:t>
-            </a:r>
-          </a:p>
-        </p:txBody>
-      </p:sp>
-      <p:cxnSp>
-        <p:nvCxnSpPr>
-          <p:cNvPr id="5" name="Connector 4"/>
-          <p:cNvCxnSpPr/>
-          <p:nvPr/>
-        </p:nvCxnSpPr>
-        <p:spPr>
-          <a:xfrm>
-            <a:off x="640080" y="1691640"/>
-            <a:ext cx="10881360" cy="0"/>
-          </a:xfrm>
-          <a:prstGeom prst="line">
-            <a:avLst/>
-          </a:prstGeom>
-          <a:ln w="12700">
-            <a:solidFill>
-              <a:srgbClr val="E2E0DA"/>
-            </a:solidFill>
-          </a:ln>
-        </p:spPr>
-        <p:style>
-          <a:lnRef idx="2">
-            <a:schemeClr val="accent1"/>
-          </a:lnRef>
-          <a:fillRef idx="0">
-            <a:schemeClr val="accent1"/>
-          </a:fillRef>
-          <a:effectRef idx="1">
-            <a:schemeClr val="accent1"/>
-          </a:effectRef>
-          <a:fontRef idx="minor">
-            <a:schemeClr val="tx1"/>
-          </a:fontRef>
-        </p:style>
-      </p:cxnSp>
-      <p:sp>
-        <p:nvSpPr>
-          <p:cNvPr id="6" name="TextBox 5"/>
-          <p:cNvSpPr txBox="1"/>
-          <p:nvPr/>
-        </p:nvSpPr>
-        <p:spPr>
-          <a:xfrm>
-            <a:off x="640080" y="1920240"/>
-            <a:ext cx="10881360" cy="4297680"/>
-          </a:xfrm>
-          <a:prstGeom prst="rect">
-            <a:avLst/>
-          </a:prstGeom>
-          <a:noFill/>
-        </p:spPr>
-        <p:txBody>
-          <a:bodyPr wrap="square" anchor="t" lIns="0" rIns="0" tIns="0" bIns="0">
-            <a:noAutofit/>
-          </a:bodyPr>
-          <a:lstStyle/>
-          <a:p>
-            <a:pPr>
-              <a:lnSpc>
-                <a:spcPct val="112000"/>
-              </a:lnSpc>
-              <a:spcAft>
-                <a:spcPts val="1000"/>
-              </a:spcAft>
-            </a:pPr>
-            <a:r>
-              <a:rPr sz="1500" b="1" i="0">
-                <a:solidFill>
-                  <a:srgbClr val="3D6D7E"/>
-                </a:solidFill>
-                <a:latin typeface="Calibri"/>
-              </a:rPr>
-              <a:t>—  </a:t>
-            </a:r>
-            <a:r>
-              <a:rPr sz="1500" b="0" i="0">
-                <a:solidFill>
-                  <a:srgbClr val="1C1E22"/>
-                </a:solidFill>
-                <a:latin typeface="Calibri"/>
-              </a:rPr>
-              <a:t>Resolving a row means one of three things happens explicitly: apply the suggested rewrite, apply a different answer, or affirmatively waive it — with the reason written into the doc as an inline comment, so the next run doesn't silently re-litigate it.</a:t>
-            </a:r>
-          </a:p>
-          <a:p>
-            <a:pPr>
-              <a:lnSpc>
-                <a:spcPct val="112000"/>
-              </a:lnSpc>
-              <a:spcAft>
-                <a:spcPts val="1000"/>
-              </a:spcAft>
-            </a:pPr>
-            <a:r>
-              <a:rPr sz="1500" b="1" i="0">
-                <a:solidFill>
-                  <a:srgbClr val="3D6D7E"/>
-                </a:solidFill>
-                <a:latin typeface="Calibri"/>
-              </a:rPr>
-              <a:t>—  </a:t>
-            </a:r>
-            <a:r>
-              <a:rPr sz="1500" b="0" i="0">
-                <a:solidFill>
-                  <a:srgbClr val="1C1E22"/>
-                </a:solidFill>
-                <a:latin typeface="Calibri"/>
-              </a:rPr>
-              <a:t>A class-17 item can't be waived with "a reviewer would understand this" — that sentence is the exact failure mode the class exists to catch.</a:t>
-            </a:r>
-          </a:p>
-          <a:p>
-            <a:pPr>
-              <a:lnSpc>
-                <a:spcPct val="112000"/>
-              </a:lnSpc>
-              <a:spcAft>
-                <a:spcPts val="1000"/>
-              </a:spcAft>
-            </a:pPr>
-            <a:r>
-              <a:rPr sz="1500" b="1" i="0">
-                <a:solidFill>
-                  <a:srgbClr val="3D6D7E"/>
-                </a:solidFill>
-                <a:latin typeface="Calibri"/>
-              </a:rPr>
-              <a:t>—  </a:t>
-            </a:r>
-            <a:r>
-              <a:rPr sz="1500" b="0" i="0">
-                <a:solidFill>
-                  <a:srgbClr val="1C1E22"/>
-                </a:solidFill>
-                <a:latin typeface="Calibri"/>
-              </a:rPr>
-              <a:t>Clearance is two separate confirmations: "cleared for new-project" prints only once every row is resolved, and copying the doc into a project folder is a second, separate action. Nothing about a clean report auto-starts anything.</a:t>
-            </a:r>
-          </a:p>
-        </p:txBody>
-      </p:sp>
-      <p:sp>
-        <p:nvSpPr>
-          <p:cNvPr id="7" name="TextBox 6"/>
-          <p:cNvSpPr txBox="1"/>
-          <p:nvPr/>
-        </p:nvSpPr>
-        <p:spPr>
-          <a:xfrm>
-            <a:off x="640080" y="6473952"/>
-            <a:ext cx="10881360" cy="292608"/>
-          </a:xfrm>
-          <a:prstGeom prst="rect">
-            <a:avLst/>
-          </a:prstGeom>
-          <a:noFill/>
-        </p:spPr>
-        <p:txBody>
-          <a:bodyPr wrap="square" anchor="t" lIns="0" rIns="0" tIns="0" bIns="0">
-            <a:noAutofit/>
-          </a:bodyPr>
-          <a:lstStyle/>
-          <a:p>
-            <a:pPr algn="l"/>
-            <a:r>
-              <a:rPr sz="1000" b="0" i="0">
-                <a:solidFill>
-                  <a:srgbClr val="5F636B"/>
-                </a:solidFill>
-                <a:latin typeface="Consolas"/>
-              </a:rPr>
-              <a:t>RATCHET · PART 5/6 · DRAFT, CHECK, SIGN OFF</a:t>
-            </a:r>
-          </a:p>
-          <a:p/>
-        </p:txBody>
-      </p:sp>
-      <p:sp>
-        <p:nvSpPr>
-          <p:cNvPr id="8" name="TextBox 7"/>
-          <p:cNvSpPr txBox="1"/>
-          <p:nvPr/>
-        </p:nvSpPr>
-        <p:spPr>
-          <a:xfrm>
-            <a:off x="10881360" y="6473952"/>
-            <a:ext cx="640080" cy="292608"/>
-          </a:xfrm>
-          <a:prstGeom prst="rect">
-            <a:avLst/>
-          </a:prstGeom>
-          <a:noFill/>
-        </p:spPr>
-        <p:txBody>
-          <a:bodyPr wrap="square" anchor="t" lIns="0" rIns="0" tIns="0" bIns="0">
-            <a:noAutofit/>
-          </a:bodyPr>
-          <a:lstStyle/>
-          <a:p>
-            <a:pPr algn="r"/>
-            <a:r>
-              <a:rPr sz="1000" b="0" i="0">
-                <a:solidFill>
-                  <a:srgbClr val="5F636B"/>
-                </a:solidFill>
-                <a:latin typeface="Consolas"/>
-              </a:rPr>
-              <a:t>11 / 16</a:t>
+              <a:t>11 / 17</a:t>
             </a:r>
           </a:p>
         </p:txBody>
@@ -4616,7 +4617,7 @@
             <a:avLst/>
           </a:prstGeom>
           <a:solidFill>
-            <a:srgbClr val="3D6D7E"/>
+            <a:srgbClr val="F6F5F2"/>
           </a:solidFill>
           <a:ln>
             <a:noFill/>
@@ -4653,7 +4654,7 @@
         </p:nvSpPr>
         <p:spPr>
           <a:xfrm>
-            <a:off x="640080" y="2651760"/>
+            <a:off x="640080" y="384048"/>
             <a:ext cx="10881360" cy="320040"/>
           </a:xfrm>
           <a:prstGeom prst="rect">
@@ -4670,11 +4671,11 @@
             <a:r>
               <a:rPr sz="1300" b="1" i="0">
                 <a:solidFill>
-                  <a:srgbClr val="D8E7EA"/>
+                  <a:srgbClr val="3D6D7E"/>
                 </a:solidFill>
                 <a:latin typeface="Consolas"/>
               </a:rPr>
-              <a:t>WHAT IT FOUND, THE FIRST TIME IT RAN FOR REAL</a:t>
+              <a:t>SIGN-OFF</a:t>
             </a:r>
           </a:p>
         </p:txBody>
@@ -4687,8 +4688,8 @@
         </p:nvSpPr>
         <p:spPr>
           <a:xfrm>
-            <a:off x="822960" y="3063240"/>
-            <a:ext cx="10515600" cy="1645920"/>
+            <a:off x="640080" y="713232"/>
+            <a:ext cx="10881360" cy="1371600"/>
           </a:xfrm>
           <a:prstGeom prst="rect">
             <a:avLst/>
@@ -4707,27 +4708,62 @@
               </a:lnSpc>
             </a:pPr>
             <a:r>
-              <a:rPr sz="4400" b="1" i="0">
-                <a:solidFill>
-                  <a:srgbClr val="FFFFFF"/>
+              <a:rPr sz="3200" b="1" i="0">
+                <a:solidFill>
+                  <a:srgbClr val="1C1E22"/>
                 </a:solidFill>
                 <a:latin typeface="Georgia"/>
               </a:rPr>
-              <a:t>Four docs, already scheduled to run, during burn-in prep</a:t>
-            </a:r>
-          </a:p>
-        </p:txBody>
-      </p:sp>
-      <p:sp>
-        <p:nvSpPr>
-          <p:cNvPr id="5" name="TextBox 4"/>
+              <a:t>Every row starts as "needs decision"</a:t>
+            </a:r>
+          </a:p>
+        </p:txBody>
+      </p:sp>
+      <p:cxnSp>
+        <p:nvCxnSpPr>
+          <p:cNvPr id="5" name="Connector 4"/>
+          <p:cNvCxnSpPr/>
+          <p:nvPr/>
+        </p:nvCxnSpPr>
+        <p:spPr>
+          <a:xfrm>
+            <a:off x="640080" y="1691640"/>
+            <a:ext cx="10881360" cy="0"/>
+          </a:xfrm>
+          <a:prstGeom prst="line">
+            <a:avLst/>
+          </a:prstGeom>
+          <a:ln w="12700">
+            <a:solidFill>
+              <a:srgbClr val="E2E0DA"/>
+            </a:solidFill>
+          </a:ln>
+        </p:spPr>
+        <p:style>
+          <a:lnRef idx="2">
+            <a:schemeClr val="accent1"/>
+          </a:lnRef>
+          <a:fillRef idx="0">
+            <a:schemeClr val="accent1"/>
+          </a:fillRef>
+          <a:effectRef idx="1">
+            <a:schemeClr val="accent1"/>
+          </a:effectRef>
+          <a:fontRef idx="minor">
+            <a:schemeClr val="tx1"/>
+          </a:fontRef>
+        </p:style>
+      </p:cxnSp>
+      <p:sp>
+        <p:nvSpPr>
+          <p:cNvPr id="6" name="TextBox 5"/>
           <p:cNvSpPr txBox="1"/>
           <p:nvPr/>
         </p:nvSpPr>
         <p:spPr>
           <a:xfrm>
-            <a:off x="868680" y="4343400"/>
-            <a:ext cx="9601200" cy="914400"/>
+            <a:off x="640080" y="1920240"/>
+            <a:ext cx="10881360" cy="4297680"/>
           </a:xfrm>
           <a:prstGeom prst="rect">
             <a:avLst/>
@@ -4742,21 +4778,195 @@
           <a:p>
             <a:pPr>
               <a:lnSpc>
-                <a:spcPct val="130000"/>
+                <a:spcPct val="112000"/>
               </a:lnSpc>
+              <a:spcAft>
+                <a:spcPts val="1000"/>
+              </a:spcAft>
             </a:pPr>
             <a:r>
-              <a:rPr sz="1600" b="0" i="1">
-                <a:solidFill>
-                  <a:srgbClr val="E3ECEE"/>
+              <a:rPr sz="1500" b="1" i="0">
+                <a:solidFill>
+                  <a:srgbClr val="3D6D7E"/>
                 </a:solidFill>
                 <a:latin typeface="Calibri"/>
               </a:rPr>
-              <a:t>The workflow's own design notes are candid that it hadn't been run on a doc nobody had drafted with the tool already in mind. This was that test.</a:t>
-            </a:r>
-          </a:p>
-        </p:txBody>
-      </p:sp>
+              <a:t>—  </a:t>
+            </a:r>
+            <a:r>
+              <a:rPr sz="1500" b="0" i="0">
+                <a:solidFill>
+                  <a:srgbClr val="1C1E22"/>
+                </a:solidFill>
+                <a:latin typeface="Calibri"/>
+              </a:rPr>
+              <a:t>Resolving a row means one of three things happens explicitly: apply the suggested rewrite, apply a different answer, or affirmatively waive it — with the reason written into the doc as an inline comment, so the next run doesn't silently re-litigate it.</a:t>
+            </a:r>
+          </a:p>
+          <a:p>
+            <a:pPr>
+              <a:lnSpc>
+                <a:spcPct val="112000"/>
+              </a:lnSpc>
+              <a:spcAft>
+                <a:spcPts val="1000"/>
+              </a:spcAft>
+            </a:pPr>
+            <a:r>
+              <a:rPr sz="1500" b="1" i="0">
+                <a:solidFill>
+                  <a:srgbClr val="3D6D7E"/>
+                </a:solidFill>
+                <a:latin typeface="Calibri"/>
+              </a:rPr>
+              <a:t>—  </a:t>
+            </a:r>
+            <a:r>
+              <a:rPr sz="1500" b="0" i="0">
+                <a:solidFill>
+                  <a:srgbClr val="1C1E22"/>
+                </a:solidFill>
+                <a:latin typeface="Calibri"/>
+              </a:rPr>
+              <a:t>A class-17 item can't be waived with "a reviewer would understand this" — that sentence is the exact failure mode the class exists to catch.</a:t>
+            </a:r>
+          </a:p>
+          <a:p>
+            <a:pPr>
+              <a:lnSpc>
+                <a:spcPct val="112000"/>
+              </a:lnSpc>
+              <a:spcAft>
+                <a:spcPts val="1000"/>
+              </a:spcAft>
+            </a:pPr>
+            <a:r>
+              <a:rPr sz="1500" b="1" i="0">
+                <a:solidFill>
+                  <a:srgbClr val="3D6D7E"/>
+                </a:solidFill>
+                <a:latin typeface="Calibri"/>
+              </a:rPr>
+              <a:t>—  </a:t>
+            </a:r>
+            <a:r>
+              <a:rPr sz="1500" b="0" i="0">
+                <a:solidFill>
+                  <a:srgbClr val="1C1E22"/>
+                </a:solidFill>
+                <a:latin typeface="Calibri"/>
+              </a:rPr>
+              <a:t>Clearance is two separate confirmations: "cleared for new-project" prints only once every row is resolved, and copying the doc into a project folder is a second, separate action. Nothing about a clean report auto-starts anything.</a:t>
+            </a:r>
+          </a:p>
+        </p:txBody>
+      </p:sp>
+      <p:sp>
+        <p:nvSpPr>
+          <p:cNvPr id="7" name="TextBox 6"/>
+          <p:cNvSpPr txBox="1"/>
+          <p:nvPr/>
+        </p:nvSpPr>
+        <p:spPr>
+          <a:xfrm>
+            <a:off x="640080" y="6473952"/>
+            <a:ext cx="10881360" cy="292608"/>
+          </a:xfrm>
+          <a:prstGeom prst="rect">
+            <a:avLst/>
+          </a:prstGeom>
+          <a:noFill/>
+        </p:spPr>
+        <p:txBody>
+          <a:bodyPr wrap="square" anchor="t" lIns="0" rIns="0" tIns="0" bIns="0">
+            <a:noAutofit/>
+          </a:bodyPr>
+          <a:lstStyle/>
+          <a:p>
+            <a:pPr algn="l"/>
+            <a:r>
+              <a:rPr sz="1000" b="0" i="0">
+                <a:solidFill>
+                  <a:srgbClr val="5F636B"/>
+                </a:solidFill>
+                <a:latin typeface="Consolas"/>
+              </a:rPr>
+              <a:t>RATCHET · PART 5/6 · DRAFT, CHECK, SIGN OFF</a:t>
+            </a:r>
+          </a:p>
+          <a:p/>
+        </p:txBody>
+      </p:sp>
+      <p:sp>
+        <p:nvSpPr>
+          <p:cNvPr id="8" name="TextBox 7"/>
+          <p:cNvSpPr txBox="1"/>
+          <p:nvPr/>
+        </p:nvSpPr>
+        <p:spPr>
+          <a:xfrm>
+            <a:off x="10881360" y="6473952"/>
+            <a:ext cx="640080" cy="292608"/>
+          </a:xfrm>
+          <a:prstGeom prst="rect">
+            <a:avLst/>
+          </a:prstGeom>
+          <a:noFill/>
+        </p:spPr>
+        <p:txBody>
+          <a:bodyPr wrap="square" anchor="t" lIns="0" rIns="0" tIns="0" bIns="0">
+            <a:noAutofit/>
+          </a:bodyPr>
+          <a:lstStyle/>
+          <a:p>
+            <a:pPr algn="r"/>
+            <a:r>
+              <a:rPr sz="1000" b="0" i="0">
+                <a:solidFill>
+                  <a:srgbClr val="5F636B"/>
+                </a:solidFill>
+                <a:latin typeface="Consolas"/>
+              </a:rPr>
+              <a:t>12 / 17</a:t>
+            </a:r>
+          </a:p>
+        </p:txBody>
+      </p:sp>
+      <p:cxnSp>
+        <p:nvCxnSpPr>
+          <p:cNvPr id="9" name="Connector 8"/>
+          <p:cNvCxnSpPr/>
+          <p:nvPr/>
+        </p:nvCxnSpPr>
+        <p:spPr>
+          <a:xfrm>
+            <a:off x="640080" y="6400800"/>
+            <a:ext cx="10881360" cy="0"/>
+          </a:xfrm>
+          <a:prstGeom prst="line">
+            <a:avLst/>
+          </a:prstGeom>
+          <a:ln w="12700">
+            <a:solidFill>
+              <a:srgbClr val="E2E0DA"/>
+            </a:solidFill>
+          </a:ln>
+        </p:spPr>
+        <p:style>
+          <a:lnRef idx="2">
+            <a:schemeClr val="accent1"/>
+          </a:lnRef>
+          <a:fillRef idx="0">
+            <a:schemeClr val="accent1"/>
+          </a:fillRef>
+          <a:effectRef idx="1">
+            <a:schemeClr val="accent1"/>
+          </a:effectRef>
+          <a:fontRef idx="minor">
+            <a:schemeClr val="tx1"/>
+          </a:fontRef>
+        </p:style>
+      </p:cxnSp>
     </p:spTree>
   </p:cSld>
   <p:clrMapOvr>
@@ -4790,7 +5000,7 @@
             <a:avLst/>
           </a:prstGeom>
           <a:solidFill>
-            <a:srgbClr val="F6F5F2"/>
+            <a:srgbClr val="3D6D7E"/>
           </a:solidFill>
           <a:ln>
             <a:noFill/>
@@ -4827,7 +5037,7 @@
         </p:nvSpPr>
         <p:spPr>
           <a:xfrm>
-            <a:off x="640080" y="1188720"/>
+            <a:off x="640080" y="2651760"/>
             <a:ext cx="10881360" cy="320040"/>
           </a:xfrm>
           <a:prstGeom prst="rect">
@@ -4844,11 +5054,11 @@
             <a:r>
               <a:rPr sz="1300" b="1" i="0">
                 <a:solidFill>
-                  <a:srgbClr val="3D6D7E"/>
+                  <a:srgbClr val="D8E7EA"/>
                 </a:solidFill>
                 <a:latin typeface="Consolas"/>
               </a:rPr>
-              <a:t>THE TIER-3 RUN</a:t>
+              <a:t>WHAT IT FOUND, THE FIRST TIME IT RAN FOR REAL</a:t>
             </a:r>
           </a:p>
         </p:txBody>
@@ -4861,42 +5071,8 @@
         </p:nvSpPr>
         <p:spPr>
           <a:xfrm>
-            <a:off x="640080" y="1645920"/>
-            <a:ext cx="10881360" cy="2377440"/>
-          </a:xfrm>
-          <a:prstGeom prst="rect">
-            <a:avLst/>
-          </a:prstGeom>
-          <a:noFill/>
-        </p:spPr>
-        <p:txBody>
-          <a:bodyPr wrap="square" anchor="ctr" lIns="0" rIns="0" tIns="0" bIns="0">
-            <a:noAutofit/>
-          </a:bodyPr>
-          <a:lstStyle/>
-          <a:p>
-            <a:r>
-              <a:rPr sz="10000" b="1" i="0">
-                <a:solidFill>
-                  <a:srgbClr val="3D6D7E"/>
-                </a:solidFill>
-                <a:latin typeface="Georgia"/>
-              </a:rPr>
-              <a:t>20 / 4</a:t>
-            </a:r>
-          </a:p>
-        </p:txBody>
-      </p:sp>
-      <p:sp>
-        <p:nvSpPr>
-          <p:cNvPr id="5" name="TextBox 4"/>
-          <p:cNvSpPr txBox="1"/>
-          <p:nvPr/>
-        </p:nvSpPr>
-        <p:spPr>
-          <a:xfrm>
-            <a:off x="685800" y="4114800"/>
-            <a:ext cx="10515600" cy="731520"/>
+            <a:off x="822960" y="3063240"/>
+            <a:ext cx="10515600" cy="1645920"/>
           </a:xfrm>
           <a:prstGeom prst="rect">
             <a:avLst/>
@@ -4909,28 +5085,33 @@
           </a:bodyPr>
           <a:lstStyle/>
           <a:p>
-            <a:r>
-              <a:rPr sz="2400" b="1" i="0">
-                <a:solidFill>
-                  <a:srgbClr val="1C1E22"/>
-                </a:solidFill>
-                <a:latin typeface="Calibri"/>
-              </a:rPr>
-              <a:t>genuine ambiguities found · shared by the hand-verified reference implementations</a:t>
-            </a:r>
-          </a:p>
-        </p:txBody>
-      </p:sp>
-      <p:sp>
-        <p:nvSpPr>
-          <p:cNvPr id="6" name="TextBox 5"/>
+            <a:pPr>
+              <a:lnSpc>
+                <a:spcPct val="105000"/>
+              </a:lnSpc>
+            </a:pPr>
+            <a:r>
+              <a:rPr sz="4400" b="1" i="0">
+                <a:solidFill>
+                  <a:srgbClr val="FFFFFF"/>
+                </a:solidFill>
+                <a:latin typeface="Georgia"/>
+              </a:rPr>
+              <a:t>Four docs, already scheduled to run, during burn-in prep</a:t>
+            </a:r>
+          </a:p>
+        </p:txBody>
+      </p:sp>
+      <p:sp>
+        <p:nvSpPr>
+          <p:cNvPr id="5" name="TextBox 4"/>
           <p:cNvSpPr txBox="1"/>
           <p:nvPr/>
         </p:nvSpPr>
         <p:spPr>
           <a:xfrm>
-            <a:off x="685800" y="4800600"/>
-            <a:ext cx="9875520" cy="1280160"/>
+            <a:off x="868680" y="4343400"/>
+            <a:ext cx="9601200" cy="914400"/>
           </a:xfrm>
           <a:prstGeom prst="rect">
             <a:avLst/>
@@ -4945,127 +5126,21 @@
           <a:p>
             <a:pPr>
               <a:lnSpc>
-                <a:spcPct val="125000"/>
+                <a:spcPct val="130000"/>
               </a:lnSpc>
             </a:pPr>
             <a:r>
-              <a:rPr sz="1600" b="0" i="0">
-                <a:solidFill>
-                  <a:srgbClr val="5F636B"/>
+              <a:rPr sz="1600" b="0" i="1">
+                <a:solidFill>
+                  <a:srgbClr val="E3ECEE"/>
                 </a:solidFill>
                 <a:latin typeface="Calibri"/>
               </a:rPr>
-              <a:t>About fifteen were doc-only imprecision the reference implementation happened to sidestep. Four were sharper: the reference implementation had faithfully carried the same gap forward rather than exposing it.</a:t>
-            </a:r>
-          </a:p>
-        </p:txBody>
-      </p:sp>
-      <p:sp>
-        <p:nvSpPr>
-          <p:cNvPr id="7" name="TextBox 6"/>
-          <p:cNvSpPr txBox="1"/>
-          <p:nvPr/>
-        </p:nvSpPr>
-        <p:spPr>
-          <a:xfrm>
-            <a:off x="640080" y="6473952"/>
-            <a:ext cx="10881360" cy="292608"/>
-          </a:xfrm>
-          <a:prstGeom prst="rect">
-            <a:avLst/>
-          </a:prstGeom>
-          <a:noFill/>
-        </p:spPr>
-        <p:txBody>
-          <a:bodyPr wrap="square" anchor="t" lIns="0" rIns="0" tIns="0" bIns="0">
-            <a:noAutofit/>
-          </a:bodyPr>
-          <a:lstStyle/>
-          <a:p>
-            <a:pPr algn="l"/>
-            <a:r>
-              <a:rPr sz="1000" b="0" i="0">
-                <a:solidFill>
-                  <a:srgbClr val="5F636B"/>
-                </a:solidFill>
-                <a:latin typeface="Consolas"/>
-              </a:rPr>
-              <a:t>RATCHET · PART 5/6 · DRAFT, CHECK, SIGN OFF</a:t>
-            </a:r>
-          </a:p>
-          <a:p/>
-        </p:txBody>
-      </p:sp>
-      <p:sp>
-        <p:nvSpPr>
-          <p:cNvPr id="8" name="TextBox 7"/>
-          <p:cNvSpPr txBox="1"/>
-          <p:nvPr/>
-        </p:nvSpPr>
-        <p:spPr>
-          <a:xfrm>
-            <a:off x="10881360" y="6473952"/>
-            <a:ext cx="640080" cy="292608"/>
-          </a:xfrm>
-          <a:prstGeom prst="rect">
-            <a:avLst/>
-          </a:prstGeom>
-          <a:noFill/>
-        </p:spPr>
-        <p:txBody>
-          <a:bodyPr wrap="square" anchor="t" lIns="0" rIns="0" tIns="0" bIns="0">
-            <a:noAutofit/>
-          </a:bodyPr>
-          <a:lstStyle/>
-          <a:p>
-            <a:pPr algn="r"/>
-            <a:r>
-              <a:rPr sz="1000" b="0" i="0">
-                <a:solidFill>
-                  <a:srgbClr val="5F636B"/>
-                </a:solidFill>
-                <a:latin typeface="Consolas"/>
-              </a:rPr>
-              <a:t>13 / 16</a:t>
-            </a:r>
-          </a:p>
-        </p:txBody>
-      </p:sp>
-      <p:cxnSp>
-        <p:nvCxnSpPr>
-          <p:cNvPr id="9" name="Connector 8"/>
-          <p:cNvCxnSpPr/>
-          <p:nvPr/>
-        </p:nvCxnSpPr>
-        <p:spPr>
-          <a:xfrm>
-            <a:off x="640080" y="6400800"/>
-            <a:ext cx="10881360" cy="0"/>
-          </a:xfrm>
-          <a:prstGeom prst="line">
-            <a:avLst/>
-          </a:prstGeom>
-          <a:ln w="12700">
-            <a:solidFill>
-              <a:srgbClr val="E2E0DA"/>
-            </a:solidFill>
-          </a:ln>
-        </p:spPr>
-        <p:style>
-          <a:lnRef idx="2">
-            <a:schemeClr val="accent1"/>
-          </a:lnRef>
-          <a:fillRef idx="0">
-            <a:schemeClr val="accent1"/>
-          </a:fillRef>
-          <a:effectRef idx="1">
-            <a:schemeClr val="accent1"/>
-          </a:effectRef>
-          <a:fontRef idx="minor">
-            <a:schemeClr val="tx1"/>
-          </a:fontRef>
-        </p:style>
-      </p:cxnSp>
+              <a:t>The workflow's own design notes are candid that it hadn't been run on a doc nobody had drafted with the tool already in mind. This was that test.</a:t>
+            </a:r>
+          </a:p>
+        </p:txBody>
+      </p:sp>
     </p:spTree>
   </p:cSld>
   <p:clrMapOvr>
@@ -5136,7 +5211,7 @@
         </p:nvSpPr>
         <p:spPr>
           <a:xfrm>
-            <a:off x="640080" y="384048"/>
+            <a:off x="640080" y="1188720"/>
             <a:ext cx="10881360" cy="320040"/>
           </a:xfrm>
           <a:prstGeom prst="rect">
@@ -5157,7 +5232,7 @@
                 </a:solidFill>
                 <a:latin typeface="Consolas"/>
               </a:rPr>
-              <a:t>THE BUG THE DOC AND THE REFERENCE SHARED</a:t>
+              <a:t>THE TIER-3 RUN</a:t>
             </a:r>
           </a:p>
         </p:txBody>
@@ -5170,8 +5245,42 @@
         </p:nvSpPr>
         <p:spPr>
           <a:xfrm>
-            <a:off x="640080" y="713232"/>
-            <a:ext cx="10881360" cy="1371600"/>
+            <a:off x="640080" y="1645920"/>
+            <a:ext cx="10881360" cy="2377440"/>
+          </a:xfrm>
+          <a:prstGeom prst="rect">
+            <a:avLst/>
+          </a:prstGeom>
+          <a:noFill/>
+        </p:spPr>
+        <p:txBody>
+          <a:bodyPr wrap="square" anchor="ctr" lIns="0" rIns="0" tIns="0" bIns="0">
+            <a:noAutofit/>
+          </a:bodyPr>
+          <a:lstStyle/>
+          <a:p>
+            <a:r>
+              <a:rPr sz="10000" b="1" i="0">
+                <a:solidFill>
+                  <a:srgbClr val="3D6D7E"/>
+                </a:solidFill>
+                <a:latin typeface="Georgia"/>
+              </a:rPr>
+              <a:t>20 / 4</a:t>
+            </a:r>
+          </a:p>
+        </p:txBody>
+      </p:sp>
+      <p:sp>
+        <p:nvSpPr>
+          <p:cNvPr id="5" name="TextBox 4"/>
+          <p:cNvSpPr txBox="1"/>
+          <p:nvPr/>
+        </p:nvSpPr>
+        <p:spPr>
+          <a:xfrm>
+            <a:off x="685800" y="4114800"/>
+            <a:ext cx="10515600" cy="731520"/>
           </a:xfrm>
           <a:prstGeom prst="rect">
             <a:avLst/>
@@ -5184,58 +5293,18 @@
           </a:bodyPr>
           <a:lstStyle/>
           <a:p>
-            <a:pPr>
-              <a:lnSpc>
-                <a:spcPct val="105000"/>
-              </a:lnSpc>
-            </a:pPr>
-            <a:r>
-              <a:rPr sz="3200" b="1" i="0">
+            <a:r>
+              <a:rPr sz="2400" b="1" i="0">
                 <a:solidFill>
                   <a:srgbClr val="1C1E22"/>
                 </a:solidFill>
-                <a:latin typeface="Georgia"/>
-              </a:rPr>
-              <a:t>One implementation, internally consistent, still wrong</a:t>
-            </a:r>
-          </a:p>
-        </p:txBody>
-      </p:sp>
-      <p:cxnSp>
-        <p:nvCxnSpPr>
-          <p:cNvPr id="5" name="Connector 4"/>
-          <p:cNvCxnSpPr/>
-          <p:nvPr/>
-        </p:nvCxnSpPr>
-        <p:spPr>
-          <a:xfrm>
-            <a:off x="640080" y="1691640"/>
-            <a:ext cx="10881360" cy="0"/>
-          </a:xfrm>
-          <a:prstGeom prst="line">
-            <a:avLst/>
-          </a:prstGeom>
-          <a:ln w="12700">
-            <a:solidFill>
-              <a:srgbClr val="E2E0DA"/>
-            </a:solidFill>
-          </a:ln>
-        </p:spPr>
-        <p:style>
-          <a:lnRef idx="2">
-            <a:schemeClr val="accent1"/>
-          </a:lnRef>
-          <a:fillRef idx="0">
-            <a:schemeClr val="accent1"/>
-          </a:fillRef>
-          <a:effectRef idx="1">
-            <a:schemeClr val="accent1"/>
-          </a:effectRef>
-          <a:fontRef idx="minor">
-            <a:schemeClr val="tx1"/>
-          </a:fontRef>
-        </p:style>
-      </p:cxnSp>
+                <a:latin typeface="Calibri"/>
+              </a:rPr>
+              <a:t>genuine ambiguities found · shared by the hand-verified reference implementations</a:t>
+            </a:r>
+          </a:p>
+        </p:txBody>
+      </p:sp>
       <p:sp>
         <p:nvSpPr>
           <p:cNvPr id="6" name="TextBox 5"/>
@@ -5244,8 +5313,8 @@
         </p:nvSpPr>
         <p:spPr>
           <a:xfrm>
-            <a:off x="640080" y="1920240"/>
-            <a:ext cx="10881360" cy="4297680"/>
+            <a:off x="685800" y="4800600"/>
+            <a:ext cx="9875520" cy="1280160"/>
           </a:xfrm>
           <a:prstGeom prst="rect">
             <a:avLst/>
@@ -5260,85 +5329,17 @@
           <a:p>
             <a:pPr>
               <a:lnSpc>
-                <a:spcPct val="112000"/>
+                <a:spcPct val="125000"/>
               </a:lnSpc>
-              <a:spcAft>
-                <a:spcPts val="1000"/>
-              </a:spcAft>
             </a:pPr>
             <a:r>
-              <a:rPr sz="1500" b="1" i="0">
-                <a:solidFill>
-                  <a:srgbClr val="3D6D7E"/>
+              <a:rPr sz="1600" b="0" i="0">
+                <a:solidFill>
+                  <a:srgbClr val="5F636B"/>
                 </a:solidFill>
                 <a:latin typeface="Calibri"/>
               </a:rPr>
-              <a:t>—  </a:t>
-            </a:r>
-            <a:r>
-              <a:rPr sz="1500" b="0" i="0">
-                <a:solidFill>
-                  <a:srgbClr val="1C1E22"/>
-                </a:solidFill>
-                <a:latin typeface="Calibri"/>
-              </a:rPr>
-              <a:t>A decimal library's coefficient range was stated as including math.MinInt64 — but the library's own Neg and Abs can't actually negate that value. The doc's range and its own required operations were quietly incompatible.</a:t>
-            </a:r>
-          </a:p>
-          <a:p>
-            <a:pPr>
-              <a:lnSpc>
-                <a:spcPct val="112000"/>
-              </a:lnSpc>
-              <a:spcAft>
-                <a:spcPts val="1000"/>
-              </a:spcAft>
-            </a:pPr>
-            <a:r>
-              <a:rPr sz="1500" b="1" i="0">
-                <a:solidFill>
-                  <a:srgbClr val="3D6D7E"/>
-                </a:solidFill>
-                <a:latin typeface="Calibri"/>
-              </a:rPr>
-              <a:t>—  </a:t>
-            </a:r>
-            <a:r>
-              <a:rPr sz="1500" b="0" i="0">
-                <a:solidFill>
-                  <a:srgbClr val="1C1E22"/>
-                </a:solidFill>
-                <a:latin typeface="Calibri"/>
-              </a:rPr>
-              <a:t>A retry engine's CLI silently defaulted a malformed delay argument to zero instead of reporting it as bad input.</a:t>
-            </a:r>
-          </a:p>
-          <a:p>
-            <a:pPr>
-              <a:lnSpc>
-                <a:spcPct val="112000"/>
-              </a:lnSpc>
-              <a:spcAft>
-                <a:spcPts val="1000"/>
-              </a:spcAft>
-            </a:pPr>
-            <a:r>
-              <a:rPr sz="1500" b="1" i="0">
-                <a:solidFill>
-                  <a:srgbClr val="3D6D7E"/>
-                </a:solidFill>
-                <a:latin typeface="Calibri"/>
-              </a:rPr>
-              <a:t>—  </a:t>
-            </a:r>
-            <a:r>
-              <a:rPr sz="1500" b="0" i="0">
-                <a:solidFill>
-                  <a:srgbClr val="1C1E22"/>
-                </a:solidFill>
-                <a:latin typeface="Calibri"/>
-              </a:rPr>
-              <a:t>The pointer-versus-value story again, in a different shape: an ambiguous spec doesn't just risk two implementations disagreeing — it can produce one implementation that's consistent with itself and still wrong, with nothing in a single build to expose the seam.</a:t>
+              <a:t>About fifteen were doc-only imprecision the reference implementation happened to sidestep. Four were sharper: the reference implementation had faithfully carried the same gap forward rather than exposing it.</a:t>
             </a:r>
           </a:p>
         </p:txBody>
@@ -5409,7 +5410,7 @@
                 </a:solidFill>
                 <a:latin typeface="Consolas"/>
               </a:rPr>
-              <a:t>14 / 16</a:t>
+              <a:t>14 / 17</a:t>
             </a:r>
           </a:p>
         </p:txBody>
@@ -5482,7 +5483,7 @@
             <a:avLst/>
           </a:prstGeom>
           <a:solidFill>
-            <a:srgbClr val="F1EFEA"/>
+            <a:srgbClr val="F6F5F2"/>
           </a:solidFill>
           <a:ln>
             <a:noFill/>
@@ -5519,7 +5520,7 @@
         </p:nvSpPr>
         <p:spPr>
           <a:xfrm>
-            <a:off x="640080" y="914400"/>
+            <a:off x="640080" y="384048"/>
             <a:ext cx="10881360" cy="320040"/>
           </a:xfrm>
           <a:prstGeom prst="rect">
@@ -5540,104 +5541,21 @@
                 </a:solidFill>
                 <a:latin typeface="Consolas"/>
               </a:rPr>
-              <a:t>A NEW CLASS, BORN FROM CONVERGENCE</a:t>
-            </a:r>
-          </a:p>
-        </p:txBody>
-      </p:sp>
-      <p:sp>
-        <p:nvSpPr>
-          <p:cNvPr id="4" name="Rectangle 3"/>
-          <p:cNvSpPr/>
-          <p:nvPr/>
-        </p:nvSpPr>
-        <p:spPr>
-          <a:xfrm>
-            <a:off x="640080" y="1508760"/>
-            <a:ext cx="73152" cy="3291840"/>
-          </a:xfrm>
-          <a:prstGeom prst="rect">
-            <a:avLst/>
-          </a:prstGeom>
-          <a:solidFill>
-            <a:srgbClr val="3D6D7E"/>
-          </a:solidFill>
-          <a:ln>
-            <a:noFill/>
-          </a:ln>
-          <a:effectLst/>
-        </p:spPr>
-        <p:style>
-          <a:lnRef idx="1">
-            <a:schemeClr val="accent1"/>
-          </a:lnRef>
-          <a:fillRef idx="3">
-            <a:schemeClr val="accent1"/>
-          </a:fillRef>
-          <a:effectRef idx="2">
-            <a:schemeClr val="accent1"/>
-          </a:effectRef>
-          <a:fontRef idx="minor">
-            <a:schemeClr val="lt1"/>
-          </a:fontRef>
-        </p:style>
-        <p:txBody>
-          <a:bodyPr rtlCol="0" anchor="ctr"/>
-          <a:lstStyle/>
-          <a:p>
-            <a:pPr algn="ctr"/>
-          </a:p>
-        </p:txBody>
-      </p:sp>
-      <p:sp>
-        <p:nvSpPr>
-          <p:cNvPr id="5" name="TextBox 4"/>
+              <a:t>THE BUG THE DOC AND THE REFERENCE SHARED</a:t>
+            </a:r>
+          </a:p>
+        </p:txBody>
+      </p:sp>
+      <p:sp>
+        <p:nvSpPr>
+          <p:cNvPr id="4" name="TextBox 3"/>
           <p:cNvSpPr txBox="1"/>
           <p:nvPr/>
         </p:nvSpPr>
         <p:spPr>
           <a:xfrm>
-            <a:off x="960120" y="1463040"/>
-            <a:ext cx="9966960" cy="3383280"/>
-          </a:xfrm>
-          <a:prstGeom prst="rect">
-            <a:avLst/>
-          </a:prstGeom>
-          <a:noFill/>
-        </p:spPr>
-        <p:txBody>
-          <a:bodyPr wrap="square" anchor="ctr" lIns="0" rIns="0" tIns="0" bIns="0">
-            <a:noAutofit/>
-          </a:bodyPr>
-          <a:lstStyle/>
-          <a:p>
-            <a:pPr>
-              <a:lnSpc>
-                <a:spcPct val="130000"/>
-              </a:lnSpc>
-            </a:pPr>
-            <a:r>
-              <a:rPr sz="2500" b="0" i="1">
-                <a:solidFill>
-                  <a:srgbClr val="1C1E22"/>
-                </a:solidFill>
-                <a:latin typeface="Georgia"/>
-              </a:rPr>
-              <a:t>Three of four independent subagents, on three unrelated docs, raised the same kind of gap without being told to look for it.</a:t>
-            </a:r>
-          </a:p>
-        </p:txBody>
-      </p:sp>
-      <p:sp>
-        <p:nvSpPr>
-          <p:cNvPr id="6" name="TextBox 5"/>
-          <p:cNvSpPr txBox="1"/>
-          <p:nvPr/>
-        </p:nvSpPr>
-        <p:spPr>
-          <a:xfrm>
-            <a:off x="960120" y="5074920"/>
-            <a:ext cx="9966960" cy="1005840"/>
+            <a:off x="640080" y="713232"/>
+            <a:ext cx="10881360" cy="1371600"/>
           </a:xfrm>
           <a:prstGeom prst="rect">
             <a:avLst/>
@@ -5652,31 +5570,66 @@
           <a:p>
             <a:pPr>
               <a:lnSpc>
-                <a:spcPct val="125000"/>
+                <a:spcPct val="105000"/>
               </a:lnSpc>
             </a:pPr>
             <a:r>
-              <a:rPr sz="1500" b="0" i="0">
-                <a:solidFill>
-                  <a:srgbClr val="5F636B"/>
-                </a:solidFill>
-                <a:latin typeface="Calibri"/>
-              </a:rPr>
-              <a:t>A function or CLI command with more than one validation guard that can fail simultaneously, each mapping to a different error, with the doc never stating which one wins. Now the checklist's eighteenth class — about as strong a signal as this catalogue ever produces that a class is real, not one reviewer's idiosyncratic taste.</a:t>
-            </a:r>
-          </a:p>
-        </p:txBody>
-      </p:sp>
-      <p:sp>
-        <p:nvSpPr>
-          <p:cNvPr id="7" name="TextBox 6"/>
+              <a:rPr sz="3200" b="1" i="0">
+                <a:solidFill>
+                  <a:srgbClr val="1C1E22"/>
+                </a:solidFill>
+                <a:latin typeface="Georgia"/>
+              </a:rPr>
+              <a:t>One implementation, internally consistent, still wrong</a:t>
+            </a:r>
+          </a:p>
+        </p:txBody>
+      </p:sp>
+      <p:cxnSp>
+        <p:nvCxnSpPr>
+          <p:cNvPr id="5" name="Connector 4"/>
+          <p:cNvCxnSpPr/>
+          <p:nvPr/>
+        </p:nvCxnSpPr>
+        <p:spPr>
+          <a:xfrm>
+            <a:off x="640080" y="1691640"/>
+            <a:ext cx="10881360" cy="0"/>
+          </a:xfrm>
+          <a:prstGeom prst="line">
+            <a:avLst/>
+          </a:prstGeom>
+          <a:ln w="12700">
+            <a:solidFill>
+              <a:srgbClr val="E2E0DA"/>
+            </a:solidFill>
+          </a:ln>
+        </p:spPr>
+        <p:style>
+          <a:lnRef idx="2">
+            <a:schemeClr val="accent1"/>
+          </a:lnRef>
+          <a:fillRef idx="0">
+            <a:schemeClr val="accent1"/>
+          </a:fillRef>
+          <a:effectRef idx="1">
+            <a:schemeClr val="accent1"/>
+          </a:effectRef>
+          <a:fontRef idx="minor">
+            <a:schemeClr val="tx1"/>
+          </a:fontRef>
+        </p:style>
+      </p:cxnSp>
+      <p:sp>
+        <p:nvSpPr>
+          <p:cNvPr id="6" name="TextBox 5"/>
           <p:cNvSpPr txBox="1"/>
           <p:nvPr/>
         </p:nvSpPr>
         <p:spPr>
           <a:xfrm>
-            <a:off x="640080" y="6473952"/>
-            <a:ext cx="10881360" cy="292608"/>
+            <a:off x="640080" y="1920240"/>
+            <a:ext cx="10881360" cy="4297680"/>
           </a:xfrm>
           <a:prstGeom prst="rect">
             <a:avLst/>
@@ -5689,30 +5642,101 @@
           </a:bodyPr>
           <a:lstStyle/>
           <a:p>
-            <a:pPr algn="l"/>
-            <a:r>
-              <a:rPr sz="1000" b="0" i="0">
-                <a:solidFill>
-                  <a:srgbClr val="5F636B"/>
-                </a:solidFill>
-                <a:latin typeface="Consolas"/>
-              </a:rPr>
-              <a:t>RATCHET · PART 5/6 · DRAFT, CHECK, SIGN OFF</a:t>
-            </a:r>
-          </a:p>
-          <a:p/>
-        </p:txBody>
-      </p:sp>
-      <p:sp>
-        <p:nvSpPr>
-          <p:cNvPr id="8" name="TextBox 7"/>
+            <a:pPr>
+              <a:lnSpc>
+                <a:spcPct val="112000"/>
+              </a:lnSpc>
+              <a:spcAft>
+                <a:spcPts val="1000"/>
+              </a:spcAft>
+            </a:pPr>
+            <a:r>
+              <a:rPr sz="1500" b="1" i="0">
+                <a:solidFill>
+                  <a:srgbClr val="3D6D7E"/>
+                </a:solidFill>
+                <a:latin typeface="Calibri"/>
+              </a:rPr>
+              <a:t>—  </a:t>
+            </a:r>
+            <a:r>
+              <a:rPr sz="1500" b="0" i="0">
+                <a:solidFill>
+                  <a:srgbClr val="1C1E22"/>
+                </a:solidFill>
+                <a:latin typeface="Calibri"/>
+              </a:rPr>
+              <a:t>A decimal library's coefficient range was stated as including math.MinInt64 — but the library's own Neg and Abs can't actually negate that value. The doc's range and its own required operations were quietly incompatible.</a:t>
+            </a:r>
+          </a:p>
+          <a:p>
+            <a:pPr>
+              <a:lnSpc>
+                <a:spcPct val="112000"/>
+              </a:lnSpc>
+              <a:spcAft>
+                <a:spcPts val="1000"/>
+              </a:spcAft>
+            </a:pPr>
+            <a:r>
+              <a:rPr sz="1500" b="1" i="0">
+                <a:solidFill>
+                  <a:srgbClr val="3D6D7E"/>
+                </a:solidFill>
+                <a:latin typeface="Calibri"/>
+              </a:rPr>
+              <a:t>—  </a:t>
+            </a:r>
+            <a:r>
+              <a:rPr sz="1500" b="0" i="0">
+                <a:solidFill>
+                  <a:srgbClr val="1C1E22"/>
+                </a:solidFill>
+                <a:latin typeface="Calibri"/>
+              </a:rPr>
+              <a:t>A retry engine's CLI silently defaulted a malformed delay argument to zero instead of reporting it as bad input.</a:t>
+            </a:r>
+          </a:p>
+          <a:p>
+            <a:pPr>
+              <a:lnSpc>
+                <a:spcPct val="112000"/>
+              </a:lnSpc>
+              <a:spcAft>
+                <a:spcPts val="1000"/>
+              </a:spcAft>
+            </a:pPr>
+            <a:r>
+              <a:rPr sz="1500" b="1" i="0">
+                <a:solidFill>
+                  <a:srgbClr val="3D6D7E"/>
+                </a:solidFill>
+                <a:latin typeface="Calibri"/>
+              </a:rPr>
+              <a:t>—  </a:t>
+            </a:r>
+            <a:r>
+              <a:rPr sz="1500" b="0" i="0">
+                <a:solidFill>
+                  <a:srgbClr val="1C1E22"/>
+                </a:solidFill>
+                <a:latin typeface="Calibri"/>
+              </a:rPr>
+              <a:t>The pointer-versus-value story again, in a different shape: an ambiguous spec doesn't just risk two implementations disagreeing — it can produce one implementation that's consistent with itself and still wrong, with nothing in a single build to expose the seam.</a:t>
+            </a:r>
+          </a:p>
+        </p:txBody>
+      </p:sp>
+      <p:sp>
+        <p:nvSpPr>
+          <p:cNvPr id="7" name="TextBox 6"/>
           <p:cNvSpPr txBox="1"/>
           <p:nvPr/>
         </p:nvSpPr>
         <p:spPr>
           <a:xfrm>
-            <a:off x="10881360" y="6473952"/>
-            <a:ext cx="640080" cy="292608"/>
+            <a:off x="640080" y="6473952"/>
+            <a:ext cx="10881360" cy="292608"/>
           </a:xfrm>
           <a:prstGeom prst="rect">
             <a:avLst/>
@@ -5725,6 +5749,42 @@
           </a:bodyPr>
           <a:lstStyle/>
           <a:p>
+            <a:pPr algn="l"/>
+            <a:r>
+              <a:rPr sz="1000" b="0" i="0">
+                <a:solidFill>
+                  <a:srgbClr val="5F636B"/>
+                </a:solidFill>
+                <a:latin typeface="Consolas"/>
+              </a:rPr>
+              <a:t>RATCHET · PART 5/6 · DRAFT, CHECK, SIGN OFF</a:t>
+            </a:r>
+          </a:p>
+          <a:p/>
+        </p:txBody>
+      </p:sp>
+      <p:sp>
+        <p:nvSpPr>
+          <p:cNvPr id="8" name="TextBox 7"/>
+          <p:cNvSpPr txBox="1"/>
+          <p:nvPr/>
+        </p:nvSpPr>
+        <p:spPr>
+          <a:xfrm>
+            <a:off x="10881360" y="6473952"/>
+            <a:ext cx="640080" cy="292608"/>
+          </a:xfrm>
+          <a:prstGeom prst="rect">
+            <a:avLst/>
+          </a:prstGeom>
+          <a:noFill/>
+        </p:spPr>
+        <p:txBody>
+          <a:bodyPr wrap="square" anchor="t" lIns="0" rIns="0" tIns="0" bIns="0">
+            <a:noAutofit/>
+          </a:bodyPr>
+          <a:lstStyle/>
+          <a:p>
             <a:pPr algn="r"/>
             <a:r>
               <a:rPr sz="1000" b="0" i="0">
@@ -5733,7 +5793,7 @@
                 </a:solidFill>
                 <a:latin typeface="Consolas"/>
               </a:rPr>
-              <a:t>15 / 16</a:t>
+              <a:t>15 / 17</a:t>
             </a:r>
           </a:p>
         </p:txBody>
@@ -5806,6 +5866,330 @@
             <a:avLst/>
           </a:prstGeom>
           <a:solidFill>
+            <a:srgbClr val="F1EFEA"/>
+          </a:solidFill>
+          <a:ln>
+            <a:noFill/>
+          </a:ln>
+          <a:effectLst/>
+        </p:spPr>
+        <p:style>
+          <a:lnRef idx="1">
+            <a:schemeClr val="accent1"/>
+          </a:lnRef>
+          <a:fillRef idx="3">
+            <a:schemeClr val="accent1"/>
+          </a:fillRef>
+          <a:effectRef idx="2">
+            <a:schemeClr val="accent1"/>
+          </a:effectRef>
+          <a:fontRef idx="minor">
+            <a:schemeClr val="lt1"/>
+          </a:fontRef>
+        </p:style>
+        <p:txBody>
+          <a:bodyPr rtlCol="0" anchor="ctr"/>
+          <a:lstStyle/>
+          <a:p>
+            <a:pPr algn="ctr"/>
+          </a:p>
+        </p:txBody>
+      </p:sp>
+      <p:sp>
+        <p:nvSpPr>
+          <p:cNvPr id="3" name="TextBox 2"/>
+          <p:cNvSpPr txBox="1"/>
+          <p:nvPr/>
+        </p:nvSpPr>
+        <p:spPr>
+          <a:xfrm>
+            <a:off x="640080" y="914400"/>
+            <a:ext cx="10881360" cy="320040"/>
+          </a:xfrm>
+          <a:prstGeom prst="rect">
+            <a:avLst/>
+          </a:prstGeom>
+          <a:noFill/>
+        </p:spPr>
+        <p:txBody>
+          <a:bodyPr wrap="square" anchor="t" lIns="0" rIns="0" tIns="0" bIns="0">
+            <a:noAutofit/>
+          </a:bodyPr>
+          <a:lstStyle/>
+          <a:p>
+            <a:r>
+              <a:rPr sz="1300" b="1" i="0">
+                <a:solidFill>
+                  <a:srgbClr val="3D6D7E"/>
+                </a:solidFill>
+                <a:latin typeface="Consolas"/>
+              </a:rPr>
+              <a:t>CLASS 18, BORN FROM CONVERGENCE</a:t>
+            </a:r>
+          </a:p>
+        </p:txBody>
+      </p:sp>
+      <p:sp>
+        <p:nvSpPr>
+          <p:cNvPr id="4" name="Rectangle 3"/>
+          <p:cNvSpPr/>
+          <p:nvPr/>
+        </p:nvSpPr>
+        <p:spPr>
+          <a:xfrm>
+            <a:off x="640080" y="1508760"/>
+            <a:ext cx="73152" cy="3291840"/>
+          </a:xfrm>
+          <a:prstGeom prst="rect">
+            <a:avLst/>
+          </a:prstGeom>
+          <a:solidFill>
+            <a:srgbClr val="3D6D7E"/>
+          </a:solidFill>
+          <a:ln>
+            <a:noFill/>
+          </a:ln>
+          <a:effectLst/>
+        </p:spPr>
+        <p:style>
+          <a:lnRef idx="1">
+            <a:schemeClr val="accent1"/>
+          </a:lnRef>
+          <a:fillRef idx="3">
+            <a:schemeClr val="accent1"/>
+          </a:fillRef>
+          <a:effectRef idx="2">
+            <a:schemeClr val="accent1"/>
+          </a:effectRef>
+          <a:fontRef idx="minor">
+            <a:schemeClr val="lt1"/>
+          </a:fontRef>
+        </p:style>
+        <p:txBody>
+          <a:bodyPr rtlCol="0" anchor="ctr"/>
+          <a:lstStyle/>
+          <a:p>
+            <a:pPr algn="ctr"/>
+          </a:p>
+        </p:txBody>
+      </p:sp>
+      <p:sp>
+        <p:nvSpPr>
+          <p:cNvPr id="5" name="TextBox 4"/>
+          <p:cNvSpPr txBox="1"/>
+          <p:nvPr/>
+        </p:nvSpPr>
+        <p:spPr>
+          <a:xfrm>
+            <a:off x="960120" y="1463040"/>
+            <a:ext cx="9966960" cy="3383280"/>
+          </a:xfrm>
+          <a:prstGeom prst="rect">
+            <a:avLst/>
+          </a:prstGeom>
+          <a:noFill/>
+        </p:spPr>
+        <p:txBody>
+          <a:bodyPr wrap="square" anchor="ctr" lIns="0" rIns="0" tIns="0" bIns="0">
+            <a:noAutofit/>
+          </a:bodyPr>
+          <a:lstStyle/>
+          <a:p>
+            <a:pPr>
+              <a:lnSpc>
+                <a:spcPct val="130000"/>
+              </a:lnSpc>
+            </a:pPr>
+            <a:r>
+              <a:rPr sz="2500" b="0" i="1">
+                <a:solidFill>
+                  <a:srgbClr val="1C1E22"/>
+                </a:solidFill>
+                <a:latin typeface="Georgia"/>
+              </a:rPr>
+              <a:t>Three of four independent subagents, on three unrelated docs, raised the same kind of gap without being told to look for it.</a:t>
+            </a:r>
+          </a:p>
+        </p:txBody>
+      </p:sp>
+      <p:sp>
+        <p:nvSpPr>
+          <p:cNvPr id="6" name="TextBox 5"/>
+          <p:cNvSpPr txBox="1"/>
+          <p:nvPr/>
+        </p:nvSpPr>
+        <p:spPr>
+          <a:xfrm>
+            <a:off x="960120" y="5074920"/>
+            <a:ext cx="9966960" cy="1005840"/>
+          </a:xfrm>
+          <a:prstGeom prst="rect">
+            <a:avLst/>
+          </a:prstGeom>
+          <a:noFill/>
+        </p:spPr>
+        <p:txBody>
+          <a:bodyPr wrap="square" anchor="t" lIns="0" rIns="0" tIns="0" bIns="0">
+            <a:noAutofit/>
+          </a:bodyPr>
+          <a:lstStyle/>
+          <a:p>
+            <a:pPr>
+              <a:lnSpc>
+                <a:spcPct val="125000"/>
+              </a:lnSpc>
+            </a:pPr>
+            <a:r>
+              <a:rPr sz="1500" b="0" i="0">
+                <a:solidFill>
+                  <a:srgbClr val="5F636B"/>
+                </a:solidFill>
+                <a:latin typeface="Calibri"/>
+              </a:rPr>
+              <a:t>A function or CLI command with more than one validation guard that can fail simultaneously, each mapping to a different error, with the doc never stating which one wins. Now the checklist's eighteenth class — about as strong a signal as this catalogue ever produces that a class is real, not one reviewer's idiosyncratic taste.</a:t>
+            </a:r>
+          </a:p>
+        </p:txBody>
+      </p:sp>
+      <p:sp>
+        <p:nvSpPr>
+          <p:cNvPr id="7" name="TextBox 6"/>
+          <p:cNvSpPr txBox="1"/>
+          <p:nvPr/>
+        </p:nvSpPr>
+        <p:spPr>
+          <a:xfrm>
+            <a:off x="640080" y="6473952"/>
+            <a:ext cx="10881360" cy="292608"/>
+          </a:xfrm>
+          <a:prstGeom prst="rect">
+            <a:avLst/>
+          </a:prstGeom>
+          <a:noFill/>
+        </p:spPr>
+        <p:txBody>
+          <a:bodyPr wrap="square" anchor="t" lIns="0" rIns="0" tIns="0" bIns="0">
+            <a:noAutofit/>
+          </a:bodyPr>
+          <a:lstStyle/>
+          <a:p>
+            <a:pPr algn="l"/>
+            <a:r>
+              <a:rPr sz="1000" b="0" i="0">
+                <a:solidFill>
+                  <a:srgbClr val="5F636B"/>
+                </a:solidFill>
+                <a:latin typeface="Consolas"/>
+              </a:rPr>
+              <a:t>RATCHET · PART 5/6 · DRAFT, CHECK, SIGN OFF</a:t>
+            </a:r>
+          </a:p>
+          <a:p/>
+        </p:txBody>
+      </p:sp>
+      <p:sp>
+        <p:nvSpPr>
+          <p:cNvPr id="8" name="TextBox 7"/>
+          <p:cNvSpPr txBox="1"/>
+          <p:nvPr/>
+        </p:nvSpPr>
+        <p:spPr>
+          <a:xfrm>
+            <a:off x="10881360" y="6473952"/>
+            <a:ext cx="640080" cy="292608"/>
+          </a:xfrm>
+          <a:prstGeom prst="rect">
+            <a:avLst/>
+          </a:prstGeom>
+          <a:noFill/>
+        </p:spPr>
+        <p:txBody>
+          <a:bodyPr wrap="square" anchor="t" lIns="0" rIns="0" tIns="0" bIns="0">
+            <a:noAutofit/>
+          </a:bodyPr>
+          <a:lstStyle/>
+          <a:p>
+            <a:pPr algn="r"/>
+            <a:r>
+              <a:rPr sz="1000" b="0" i="0">
+                <a:solidFill>
+                  <a:srgbClr val="5F636B"/>
+                </a:solidFill>
+                <a:latin typeface="Consolas"/>
+              </a:rPr>
+              <a:t>16 / 17</a:t>
+            </a:r>
+          </a:p>
+        </p:txBody>
+      </p:sp>
+      <p:cxnSp>
+        <p:nvCxnSpPr>
+          <p:cNvPr id="9" name="Connector 8"/>
+          <p:cNvCxnSpPr/>
+          <p:nvPr/>
+        </p:nvCxnSpPr>
+        <p:spPr>
+          <a:xfrm>
+            <a:off x="640080" y="6400800"/>
+            <a:ext cx="10881360" cy="0"/>
+          </a:xfrm>
+          <a:prstGeom prst="line">
+            <a:avLst/>
+          </a:prstGeom>
+          <a:ln w="12700">
+            <a:solidFill>
+              <a:srgbClr val="E2E0DA"/>
+            </a:solidFill>
+          </a:ln>
+        </p:spPr>
+        <p:style>
+          <a:lnRef idx="2">
+            <a:schemeClr val="accent1"/>
+          </a:lnRef>
+          <a:fillRef idx="0">
+            <a:schemeClr val="accent1"/>
+          </a:fillRef>
+          <a:effectRef idx="1">
+            <a:schemeClr val="accent1"/>
+          </a:effectRef>
+          <a:fontRef idx="minor">
+            <a:schemeClr val="tx1"/>
+          </a:fontRef>
+        </p:style>
+      </p:cxnSp>
+    </p:spTree>
+  </p:cSld>
+  <p:clrMapOvr>
+    <a:masterClrMapping/>
+  </p:clrMapOvr>
+</p:sld>
+</file>
+
+<file path=ppt/slides/slide17.xml><?xml version="1.0" encoding="utf-8"?>
+<p:sld xmlns:a="http://schemas.openxmlformats.org/drawingml/2006/main" xmlns:p="http://schemas.openxmlformats.org/presentationml/2006/main" xmlns:r="http://schemas.openxmlformats.org/officeDocument/2006/relationships">
+  <p:cSld>
+    <p:spTree>
+      <p:nvGrpSpPr>
+        <p:cNvPr id="1" name=""/>
+        <p:cNvGrpSpPr/>
+        <p:nvPr/>
+      </p:nvGrpSpPr>
+      <p:grpSpPr/>
+      <p:sp>
+        <p:nvSpPr>
+          <p:cNvPr id="2" name="Rectangle 1"/>
+          <p:cNvSpPr/>
+          <p:nvPr/>
+        </p:nvSpPr>
+        <p:spPr>
+          <a:xfrm>
+            <a:off x="0" y="0"/>
+            <a:ext cx="12191695" cy="6858000"/>
+          </a:xfrm>
+          <a:prstGeom prst="rect">
+            <a:avLst/>
+          </a:prstGeom>
+          <a:solidFill>
             <a:srgbClr val="1C1E22"/>
           </a:solidFill>
           <a:ln>
@@ -6054,7 +6438,7 @@
                 </a:solidFill>
                 <a:latin typeface="Consolas"/>
               </a:rPr>
-              <a:t>16 / 16</a:t>
+              <a:t>17 / 17</a:t>
             </a:r>
           </a:p>
         </p:txBody>
@@ -6429,7 +6813,7 @@
                 </a:solidFill>
                 <a:latin typeface="Consolas"/>
               </a:rPr>
-              <a:t>02 / 16</a:t>
+              <a:t>02 / 17</a:t>
             </a:r>
           </a:p>
         </p:txBody>
@@ -6753,7 +7137,7 @@
                 </a:solidFill>
                 <a:latin typeface="Consolas"/>
               </a:rPr>
-              <a:t>03 / 16</a:t>
+              <a:t>03 / 17</a:t>
             </a:r>
           </a:p>
         </p:txBody>
@@ -7136,7 +7520,7 @@
                 </a:solidFill>
                 <a:latin typeface="Consolas"/>
               </a:rPr>
-              <a:t>04 / 16</a:t>
+              <a:t>04 / 17</a:t>
             </a:r>
           </a:p>
         </p:txBody>
@@ -7546,7 +7930,7 @@
                 </a:solidFill>
                 <a:latin typeface="Consolas"/>
               </a:rPr>
-              <a:t>05 / 16</a:t>
+              <a:t>05 / 17</a:t>
             </a:r>
           </a:p>
         </p:txBody>
@@ -7830,7 +8214,7 @@
                 </a:solidFill>
                 <a:latin typeface="Calibri"/>
               </a:rPr>
-              <a:t>The first arithmetic check flagged any "identifier operator identifier" pattern — and lit up on every single Go pointer type, because g *Game reads exactly like arithmetic to a regex that doesn't know Go syntax.</a:t>
+              <a:t>The first arithmetic check — one of eighteen catalogued ambiguity classes — flagged any "identifier operator identifier" pattern, and lit up on every single Go pointer type, because g *Game reads exactly like arithmetic to a regex that doesn't know Go syntax.</a:t>
             </a:r>
           </a:p>
           <a:p>
@@ -7929,7 +8313,7 @@
                 </a:solidFill>
                 <a:latin typeface="Consolas"/>
               </a:rPr>
-              <a:t>06 / 16</a:t>
+              <a:t>06 / 17</a:t>
             </a:r>
           </a:p>
         </p:txBody>
@@ -8060,7 +8444,7 @@
                 </a:solidFill>
                 <a:latin typeface="Consolas"/>
               </a:rPr>
-              <a:t>TWO SHARPER CHECKS</a:t>
+              <a:t>FIVE OF EIGHTEEN GET A KEYWORD SCAN</a:t>
             </a:r>
           </a:p>
         </p:txBody>
@@ -8093,13 +8477,13 @@
               </a:lnSpc>
             </a:pPr>
             <a:r>
-              <a:rPr sz="3200" b="1" i="0">
+              <a:rPr sz="3000" b="1" i="0">
                 <a:solidFill>
                   <a:srgbClr val="1C1E22"/>
                 </a:solidFill>
                 <a:latin typeface="Georgia"/>
               </a:rPr>
-              <a:t>construction-form and bead-size</a:t>
+              <a:t>The rest need judgment — no shortcut around that</a:t>
             </a:r>
           </a:p>
         </p:txBody>
@@ -8139,16 +8523,451 @@
           </a:fontRef>
         </p:style>
       </p:cxnSp>
-      <p:sp>
-        <p:nvSpPr>
-          <p:cNvPr id="6" name="TextBox 5"/>
+      <p:graphicFrame>
+        <p:nvGraphicFramePr>
+          <p:cNvPr id="6" name="Table 5"/>
+          <p:cNvGraphicFramePr>
+            <a:graphicFrameLocks noGrp="1"/>
+          </p:cNvGraphicFramePr>
+          <p:nvPr/>
+        </p:nvGraphicFramePr>
+        <p:xfrm>
+          <a:off x="640080" y="2057400"/>
+          <a:ext cx="10881358" cy="2743200"/>
+        </p:xfrm>
+        <a:graphic>
+          <a:graphicData uri="http://schemas.openxmlformats.org/drawingml/2006/table">
+            <a:tbl>
+              <a:tblPr firstRow="1" bandRow="1">
+                <a:tableStyleId>{5C22544A-7EE6-4342-B048-85BDC9FD1C3A}</a:tableStyleId>
+              </a:tblPr>
+              <a:tblGrid>
+                <a:gridCol w="1940087"/>
+                <a:gridCol w="4808042"/>
+                <a:gridCol w="4133229"/>
+              </a:tblGrid>
+              <a:tr h="457200">
+                <a:tc>
+                  <a:txBody>
+                    <a:bodyPr/>
+                    <a:lstStyle/>
+                    <a:p>
+                      <a:r>
+                        <a:rPr sz="1300" b="1" i="0">
+                          <a:solidFill>
+                            <a:srgbClr val="FFFFFF"/>
+                          </a:solidFill>
+                          <a:latin typeface="Consolas"/>
+                        </a:rPr>
+                        <a:t>Class</a:t>
+                      </a:r>
+                    </a:p>
+                  </a:txBody>
+                  <a:tcPr marL="73152" marT="36576" marB="36576" anchor="ctr">
+                    <a:solidFill>
+                      <a:srgbClr val="1C1E22"/>
+                    </a:solidFill>
+                  </a:tcPr>
+                </a:tc>
+                <a:tc>
+                  <a:txBody>
+                    <a:bodyPr/>
+                    <a:lstStyle/>
+                    <a:p>
+                      <a:r>
+                        <a:rPr sz="1300" b="1" i="0">
+                          <a:solidFill>
+                            <a:srgbClr val="FFFFFF"/>
+                          </a:solidFill>
+                          <a:latin typeface="Consolas"/>
+                        </a:rPr>
+                        <a:t>What it catches</a:t>
+                      </a:r>
+                    </a:p>
+                  </a:txBody>
+                  <a:tcPr marL="73152" marT="36576" marB="36576" anchor="ctr">
+                    <a:solidFill>
+                      <a:srgbClr val="1C1E22"/>
+                    </a:solidFill>
+                  </a:tcPr>
+                </a:tc>
+                <a:tc>
+                  <a:txBody>
+                    <a:bodyPr/>
+                    <a:lstStyle/>
+                    <a:p>
+                      <a:r>
+                        <a:rPr sz="1300" b="1" i="0">
+                          <a:solidFill>
+                            <a:srgbClr val="FFFFFF"/>
+                          </a:solidFill>
+                          <a:latin typeface="Consolas"/>
+                        </a:rPr>
+                        <a:t>What clears it</a:t>
+                      </a:r>
+                    </a:p>
+                  </a:txBody>
+                  <a:tcPr marL="73152" marT="36576" marB="36576" anchor="ctr">
+                    <a:solidFill>
+                      <a:srgbClr val="1C1E22"/>
+                    </a:solidFill>
+                  </a:tcPr>
+                </a:tc>
+              </a:tr>
+              <a:tr h="457200">
+                <a:tc>
+                  <a:txBody>
+                    <a:bodyPr wrap="square"/>
+                    <a:lstStyle/>
+                    <a:p>
+                      <a:r>
+                        <a:rPr sz="1300" b="1" i="0">
+                          <a:solidFill>
+                            <a:srgbClr val="1C1E22"/>
+                          </a:solidFill>
+                          <a:latin typeface="Calibri"/>
+                        </a:rPr>
+                        <a:t>1 — Geometry</a:t>
+                      </a:r>
+                    </a:p>
+                  </a:txBody>
+                  <a:tcPr marL="73152" marT="27432" marB="27432" anchor="ctr">
+                    <a:solidFill>
+                      <a:srgbClr val="FFFFFF"/>
+                    </a:solidFill>
+                  </a:tcPr>
+                </a:tc>
+                <a:tc>
+                  <a:txBody>
+                    <a:bodyPr wrap="square"/>
+                    <a:lstStyle/>
+                    <a:p>
+                      <a:r>
+                        <a:rPr sz="1300" b="0" i="0">
+                          <a:solidFill>
+                            <a:srgbClr val="1C1E22"/>
+                          </a:solidFill>
+                          <a:latin typeface="Calibri"/>
+                        </a:rPr>
+                        <a:t>Relative-direction language with no coordinate math: "diagonally," "clockwise," "toward/forward/backward," "row above/below"</a:t>
+                      </a:r>
+                    </a:p>
+                  </a:txBody>
+                  <a:tcPr marL="73152" marT="27432" marB="27432" anchor="ctr">
+                    <a:solidFill>
+                      <a:srgbClr val="FFFFFF"/>
+                    </a:solidFill>
+                  </a:tcPr>
+                </a:tc>
+                <a:tc>
+                  <a:txBody>
+                    <a:bodyPr wrap="square"/>
+                    <a:lstStyle/>
+                    <a:p>
+                      <a:r>
+                        <a:rPr sz="1300" b="0" i="0">
+                          <a:solidFill>
+                            <a:srgbClr val="1C1E22"/>
+                          </a:solidFill>
+                          <a:latin typeface="Calibri"/>
+                        </a:rPr>
+                        <a:t>A Δrow/Δcol, a (±n,±n) pair, or an algebraic delta (a1→b2) nearby</a:t>
+                      </a:r>
+                    </a:p>
+                  </a:txBody>
+                  <a:tcPr marL="73152" marT="27432" marB="27432" anchor="ctr">
+                    <a:solidFill>
+                      <a:srgbClr val="FFFFFF"/>
+                    </a:solidFill>
+                  </a:tcPr>
+                </a:tc>
+              </a:tr>
+              <a:tr h="457200">
+                <a:tc>
+                  <a:txBody>
+                    <a:bodyPr wrap="square"/>
+                    <a:lstStyle/>
+                    <a:p>
+                      <a:r>
+                        <a:rPr sz="1300" b="1" i="0">
+                          <a:solidFill>
+                            <a:srgbClr val="1C1E22"/>
+                          </a:solidFill>
+                          <a:latin typeface="Calibri"/>
+                        </a:rPr>
+                        <a:t>2 — Arithmetic</a:t>
+                      </a:r>
+                    </a:p>
+                  </a:txBody>
+                  <a:tcPr marL="73152" marT="27432" marB="27432" anchor="ctr">
+                    <a:solidFill>
+                      <a:srgbClr val="F1EFEA"/>
+                    </a:solidFill>
+                  </a:tcPr>
+                </a:tc>
+                <a:tc>
+                  <a:txBody>
+                    <a:bodyPr wrap="square"/>
+                    <a:lstStyle/>
+                    <a:p>
+                      <a:r>
+                        <a:rPr sz="1300" b="0" i="0">
+                          <a:solidFill>
+                            <a:srgbClr val="1C1E22"/>
+                          </a:solidFill>
+                          <a:latin typeface="Calibri"/>
+                        </a:rPr>
+                        <a:t>"sum of," "the formula," "FNV," "hash of," "modulo" with no result stated</a:t>
+                      </a:r>
+                    </a:p>
+                  </a:txBody>
+                  <a:tcPr marL="73152" marT="27432" marB="27432" anchor="ctr">
+                    <a:solidFill>
+                      <a:srgbClr val="F1EFEA"/>
+                    </a:solidFill>
+                  </a:tcPr>
+                </a:tc>
+                <a:tc>
+                  <a:txBody>
+                    <a:bodyPr wrap="square"/>
+                    <a:lstStyle/>
+                    <a:p>
+                      <a:r>
+                        <a:rPr sz="1300" b="0" i="0">
+                          <a:solidFill>
+                            <a:srgbClr val="1C1E22"/>
+                          </a:solidFill>
+                          <a:latin typeface="Calibri"/>
+                        </a:rPr>
+                        <a:t>A literal computed number nearby (= n, e.g. n, → n)</a:t>
+                      </a:r>
+                    </a:p>
+                  </a:txBody>
+                  <a:tcPr marL="73152" marT="27432" marB="27432" anchor="ctr">
+                    <a:solidFill>
+                      <a:srgbClr val="F1EFEA"/>
+                    </a:solidFill>
+                  </a:tcPr>
+                </a:tc>
+              </a:tr>
+              <a:tr h="457200">
+                <a:tc>
+                  <a:txBody>
+                    <a:bodyPr wrap="square"/>
+                    <a:lstStyle/>
+                    <a:p>
+                      <a:r>
+                        <a:rPr sz="1300" b="1" i="0">
+                          <a:solidFill>
+                            <a:srgbClr val="1C1E22"/>
+                          </a:solidFill>
+                          <a:latin typeface="Calibri"/>
+                        </a:rPr>
+                        <a:t>6 — Symbolic refs</a:t>
+                      </a:r>
+                    </a:p>
+                  </a:txBody>
+                  <a:tcPr marL="73152" marT="27432" marB="27432" anchor="ctr">
+                    <a:solidFill>
+                      <a:srgbClr val="FFFFFF"/>
+                    </a:solidFill>
+                  </a:tcPr>
+                </a:tc>
+                <a:tc>
+                  <a:txBody>
+                    <a:bodyPr wrap="square"/>
+                    <a:lstStyle/>
+                    <a:p>
+                      <a:r>
+                        <a:rPr sz="1300" b="0" i="0">
+                          <a:solidFill>
+                            <a:srgbClr val="1C1E22"/>
+                          </a:solidFill>
+                          <a:latin typeface="Calibri"/>
+                        </a:rPr>
+                        <a:t>"use the X type from Y," "as defined above," "the standard value"</a:t>
+                      </a:r>
+                    </a:p>
+                  </a:txBody>
+                  <a:tcPr marL="73152" marT="27432" marB="27432" anchor="ctr">
+                    <a:solidFill>
+                      <a:srgbClr val="FFFFFF"/>
+                    </a:solidFill>
+                  </a:tcPr>
+                </a:tc>
+                <a:tc>
+                  <a:txBody>
+                    <a:bodyPr wrap="square"/>
+                    <a:lstStyle/>
+                    <a:p>
+                      <a:r>
+                        <a:rPr sz="1300" b="0" i="0">
+                          <a:solidFill>
+                            <a:srgbClr val="1C1E22"/>
+                          </a:solidFill>
+                          <a:latin typeface="Calibri"/>
+                        </a:rPr>
+                        <a:t>A literal value given on the same line</a:t>
+                      </a:r>
+                    </a:p>
+                  </a:txBody>
+                  <a:tcPr marL="73152" marT="27432" marB="27432" anchor="ctr">
+                    <a:solidFill>
+                      <a:srgbClr val="FFFFFF"/>
+                    </a:solidFill>
+                  </a:tcPr>
+                </a:tc>
+              </a:tr>
+              <a:tr h="457200">
+                <a:tc>
+                  <a:txBody>
+                    <a:bodyPr wrap="square"/>
+                    <a:lstStyle/>
+                    <a:p>
+                      <a:r>
+                        <a:rPr sz="1300" b="1" i="0">
+                          <a:solidFill>
+                            <a:srgbClr val="1C1E22"/>
+                          </a:solidFill>
+                          <a:latin typeface="Calibri"/>
+                        </a:rPr>
+                        <a:t>7 — Entry point</a:t>
+                      </a:r>
+                    </a:p>
+                  </a:txBody>
+                  <a:tcPr marL="73152" marT="27432" marB="27432" anchor="ctr">
+                    <a:solidFill>
+                      <a:srgbClr val="F1EFEA"/>
+                    </a:solidFill>
+                  </a:tcPr>
+                </a:tc>
+                <a:tc>
+                  <a:txBody>
+                    <a:bodyPr wrap="square"/>
+                    <a:lstStyle/>
+                    <a:p>
+                      <a:r>
+                        <a:rPr sz="1300" b="0" i="0">
+                          <a:solidFill>
+                            <a:srgbClr val="1C1E22"/>
+                          </a:solidFill>
+                          <a:latin typeface="Calibri"/>
+                        </a:rPr>
+                        <a:t>main.go named as an output file</a:t>
+                      </a:r>
+                    </a:p>
+                  </a:txBody>
+                  <a:tcPr marL="73152" marT="27432" marB="27432" anchor="ctr">
+                    <a:solidFill>
+                      <a:srgbClr val="F1EFEA"/>
+                    </a:solidFill>
+                  </a:tcPr>
+                </a:tc>
+                <a:tc>
+                  <a:txBody>
+                    <a:bodyPr wrap="square"/>
+                    <a:lstStyle/>
+                    <a:p>
+                      <a:r>
+                        <a:rPr sz="1300" b="0" i="0">
+                          <a:solidFill>
+                            <a:srgbClr val="1C1E22"/>
+                          </a:solidFill>
+                          <a:latin typeface="Calibri"/>
+                        </a:rPr>
+                        <a:t>The literal string "package main" appearing anywhere in the doc</a:t>
+                      </a:r>
+                    </a:p>
+                  </a:txBody>
+                  <a:tcPr marL="73152" marT="27432" marB="27432" anchor="ctr">
+                    <a:solidFill>
+                      <a:srgbClr val="F1EFEA"/>
+                    </a:solidFill>
+                  </a:tcPr>
+                </a:tc>
+              </a:tr>
+              <a:tr h="457200">
+                <a:tc>
+                  <a:txBody>
+                    <a:bodyPr wrap="square"/>
+                    <a:lstStyle/>
+                    <a:p>
+                      <a:r>
+                        <a:rPr sz="1300" b="1" i="0">
+                          <a:solidFill>
+                            <a:srgbClr val="1C1E22"/>
+                          </a:solidFill>
+                          <a:latin typeface="Calibri"/>
+                        </a:rPr>
+                        <a:t>17 — Category phrase</a:t>
+                      </a:r>
+                    </a:p>
+                  </a:txBody>
+                  <a:tcPr marL="73152" marT="27432" marB="27432" anchor="ctr">
+                    <a:solidFill>
+                      <a:srgbClr val="FFFFFF"/>
+                    </a:solidFill>
+                  </a:tcPr>
+                </a:tc>
+                <a:tc>
+                  <a:txBody>
+                    <a:bodyPr wrap="square"/>
+                    <a:lstStyle/>
+                    <a:p>
+                      <a:r>
+                        <a:rPr sz="1300" b="0" i="0">
+                          <a:solidFill>
+                            <a:srgbClr val="1C1E22"/>
+                          </a:solidFill>
+                          <a:latin typeface="Calibri"/>
+                        </a:rPr>
+                        <a:t>"standard," "normal," "usual," "conventional" next to a rules/procedure noun</a:t>
+                      </a:r>
+                    </a:p>
+                  </a:txBody>
+                  <a:tcPr marL="73152" marT="27432" marB="27432" anchor="ctr">
+                    <a:solidFill>
+                      <a:srgbClr val="FFFFFF"/>
+                    </a:solidFill>
+                  </a:tcPr>
+                </a:tc>
+                <a:tc>
+                  <a:txBody>
+                    <a:bodyPr wrap="square"/>
+                    <a:lstStyle/>
+                    <a:p>
+                      <a:r>
+                        <a:rPr sz="1300" b="0" i="0">
+                          <a:solidFill>
+                            <a:srgbClr val="1C1E22"/>
+                          </a:solidFill>
+                          <a:latin typeface="Calibri"/>
+                        </a:rPr>
+                        <a:t>Nothing — every hit stays flagged; see next</a:t>
+                      </a:r>
+                    </a:p>
+                  </a:txBody>
+                  <a:tcPr marL="73152" marT="27432" marB="27432" anchor="ctr">
+                    <a:solidFill>
+                      <a:srgbClr val="FFFFFF"/>
+                    </a:solidFill>
+                  </a:tcPr>
+                </a:tc>
+              </a:tr>
+            </a:tbl>
+          </a:graphicData>
+        </a:graphic>
+      </p:graphicFrame>
+      <p:sp>
+        <p:nvSpPr>
+          <p:cNvPr id="7" name="TextBox 6"/>
           <p:cNvSpPr txBox="1"/>
           <p:nvPr/>
         </p:nvSpPr>
         <p:spPr>
           <a:xfrm>
-            <a:off x="640080" y="1965960"/>
-            <a:ext cx="10881360" cy="4206240"/>
+            <a:off x="640080" y="6473952"/>
+            <a:ext cx="10881360" cy="292608"/>
           </a:xfrm>
           <a:prstGeom prst="rect">
             <a:avLst/>
@@ -8161,91 +8980,30 @@
           </a:bodyPr>
           <a:lstStyle/>
           <a:p>
-            <a:pPr>
-              <a:lnSpc>
-                <a:spcPct val="112000"/>
-              </a:lnSpc>
-              <a:spcAft>
-                <a:spcPts val="1000"/>
-              </a:spcAft>
-            </a:pPr>
-            <a:r>
-              <a:rPr sz="1700" b="1" i="0">
-                <a:solidFill>
-                  <a:srgbClr val="3D6D7E"/>
-                </a:solidFill>
-                <a:latin typeface="Calibri"/>
-              </a:rPr>
-              <a:t>—  </a:t>
-            </a:r>
-            <a:r>
-              <a:rPr sz="1700" b="1" i="0">
-                <a:solidFill>
-                  <a:srgbClr val="1C1E22"/>
-                </a:solidFill>
-                <a:latin typeface="Calibri"/>
-              </a:rPr>
-              <a:t>construction-form </a:t>
-            </a:r>
-            <a:r>
-              <a:rPr sz="1700" b="0" i="0">
-                <a:solidFill>
-                  <a:srgbClr val="1C1E22"/>
-                </a:solidFill>
-                <a:latin typeface="Calibri"/>
-              </a:rPr>
-              <a:t>flags a Cross-Bead Contract that enumerates a polymorphic type's variants without ever saying pointer or value — the exact defect from the expression-VM story, where two independent beads picked opposite constructions of the same undeclared type.</a:t>
-            </a:r>
-          </a:p>
-          <a:p>
-            <a:pPr>
-              <a:lnSpc>
-                <a:spcPct val="112000"/>
-              </a:lnSpc>
-              <a:spcAft>
-                <a:spcPts val="1000"/>
-              </a:spcAft>
-            </a:pPr>
-            <a:r>
-              <a:rPr sz="1700" b="1" i="0">
-                <a:solidFill>
-                  <a:srgbClr val="3D6D7E"/>
-                </a:solidFill>
-                <a:latin typeface="Calibri"/>
-              </a:rPr>
-              <a:t>—  </a:t>
-            </a:r>
-            <a:r>
-              <a:rPr sz="1700" b="1" i="0">
-                <a:solidFill>
-                  <a:srgbClr val="1C1E22"/>
-                </a:solidFill>
-                <a:latin typeface="Calibri"/>
-              </a:rPr>
-              <a:t>bead-size </a:t>
-            </a:r>
-            <a:r>
-              <a:rPr sz="1700" b="0" i="0">
-                <a:solidFill>
-                  <a:srgbClr val="1C1E22"/>
-                </a:solidFill>
-                <a:latin typeface="Calibri"/>
-              </a:rPr>
-              <a:t>flags a Decomposition Notes entry that owns too many functions and is wired too tightly into other beads' work — calibrated against the project's own history until it caught every bead known to have actually spiraled.</a:t>
-            </a:r>
-          </a:p>
-        </p:txBody>
-      </p:sp>
-      <p:sp>
-        <p:nvSpPr>
-          <p:cNvPr id="7" name="TextBox 6"/>
+            <a:pPr algn="l"/>
+            <a:r>
+              <a:rPr sz="1000" b="0" i="0">
+                <a:solidFill>
+                  <a:srgbClr val="5F636B"/>
+                </a:solidFill>
+                <a:latin typeface="Consolas"/>
+              </a:rPr>
+              <a:t>RATCHET · PART 5/6 · DRAFT, CHECK, SIGN OFF</a:t>
+            </a:r>
+          </a:p>
+          <a:p/>
+        </p:txBody>
+      </p:sp>
+      <p:sp>
+        <p:nvSpPr>
+          <p:cNvPr id="8" name="TextBox 7"/>
           <p:cNvSpPr txBox="1"/>
           <p:nvPr/>
         </p:nvSpPr>
         <p:spPr>
           <a:xfrm>
-            <a:off x="640080" y="6473952"/>
-            <a:ext cx="10881360" cy="292608"/>
+            <a:off x="10881360" y="6473952"/>
+            <a:ext cx="640080" cy="292608"/>
           </a:xfrm>
           <a:prstGeom prst="rect">
             <a:avLst/>
@@ -8258,7 +9016,7 @@
           </a:bodyPr>
           <a:lstStyle/>
           <a:p>
-            <a:pPr algn="l"/>
+            <a:pPr algn="r"/>
             <a:r>
               <a:rPr sz="1000" b="0" i="0">
                 <a:solidFill>
@@ -8266,43 +9024,7 @@
                 </a:solidFill>
                 <a:latin typeface="Consolas"/>
               </a:rPr>
-              <a:t>RATCHET · PART 5/6 · DRAFT, CHECK, SIGN OFF</a:t>
-            </a:r>
-          </a:p>
-          <a:p/>
-        </p:txBody>
-      </p:sp>
-      <p:sp>
-        <p:nvSpPr>
-          <p:cNvPr id="8" name="TextBox 7"/>
-          <p:cNvSpPr txBox="1"/>
-          <p:nvPr/>
-        </p:nvSpPr>
-        <p:spPr>
-          <a:xfrm>
-            <a:off x="10881360" y="6473952"/>
-            <a:ext cx="640080" cy="292608"/>
-          </a:xfrm>
-          <a:prstGeom prst="rect">
-            <a:avLst/>
-          </a:prstGeom>
-          <a:noFill/>
-        </p:spPr>
-        <p:txBody>
-          <a:bodyPr wrap="square" anchor="t" lIns="0" rIns="0" tIns="0" bIns="0">
-            <a:noAutofit/>
-          </a:bodyPr>
-          <a:lstStyle/>
-          <a:p>
-            <a:pPr algn="r"/>
-            <a:r>
-              <a:rPr sz="1000" b="0" i="0">
-                <a:solidFill>
-                  <a:srgbClr val="5F636B"/>
-                </a:solidFill>
-                <a:latin typeface="Consolas"/>
-              </a:rPr>
-              <a:t>07 / 16</a:t>
+              <a:t>07 / 17</a:t>
             </a:r>
           </a:p>
         </p:txBody>
@@ -8375,7 +9097,7 @@
             <a:avLst/>
           </a:prstGeom>
           <a:solidFill>
-            <a:srgbClr val="F1EFEA"/>
+            <a:srgbClr val="F6F5F2"/>
           </a:solidFill>
           <a:ln>
             <a:noFill/>
@@ -8412,7 +9134,7 @@
         </p:nvSpPr>
         <p:spPr>
           <a:xfrm>
-            <a:off x="640080" y="914400"/>
+            <a:off x="640080" y="384048"/>
             <a:ext cx="10881360" cy="320040"/>
           </a:xfrm>
           <a:prstGeom prst="rect">
@@ -8433,104 +9155,21 @@
                 </a:solidFill>
                 <a:latin typeface="Consolas"/>
               </a:rPr>
-              <a:t>THE ONE CLASS JUDGMENT CAN'T CATCH</a:t>
-            </a:r>
-          </a:p>
-        </p:txBody>
-      </p:sp>
-      <p:sp>
-        <p:nvSpPr>
-          <p:cNvPr id="4" name="Rectangle 3"/>
-          <p:cNvSpPr/>
-          <p:nvPr/>
-        </p:nvSpPr>
-        <p:spPr>
-          <a:xfrm>
-            <a:off x="640080" y="1508760"/>
-            <a:ext cx="73152" cy="3291840"/>
-          </a:xfrm>
-          <a:prstGeom prst="rect">
-            <a:avLst/>
-          </a:prstGeom>
-          <a:solidFill>
-            <a:srgbClr val="3D6D7E"/>
-          </a:solidFill>
-          <a:ln>
-            <a:noFill/>
-          </a:ln>
-          <a:effectLst/>
-        </p:spPr>
-        <p:style>
-          <a:lnRef idx="1">
-            <a:schemeClr val="accent1"/>
-          </a:lnRef>
-          <a:fillRef idx="3">
-            <a:schemeClr val="accent1"/>
-          </a:fillRef>
-          <a:effectRef idx="2">
-            <a:schemeClr val="accent1"/>
-          </a:effectRef>
-          <a:fontRef idx="minor">
-            <a:schemeClr val="lt1"/>
-          </a:fontRef>
-        </p:style>
-        <p:txBody>
-          <a:bodyPr rtlCol="0" anchor="ctr"/>
-          <a:lstStyle/>
-          <a:p>
-            <a:pPr algn="ctr"/>
-          </a:p>
-        </p:txBody>
-      </p:sp>
-      <p:sp>
-        <p:nvSpPr>
-          <p:cNvPr id="5" name="TextBox 4"/>
+              <a:t>TWO SHARPER CHECKS, SAME TOOL</a:t>
+            </a:r>
+          </a:p>
+        </p:txBody>
+      </p:sp>
+      <p:sp>
+        <p:nvSpPr>
+          <p:cNvPr id="4" name="TextBox 3"/>
           <p:cNvSpPr txBox="1"/>
           <p:nvPr/>
         </p:nvSpPr>
         <p:spPr>
           <a:xfrm>
-            <a:off x="960120" y="1463040"/>
-            <a:ext cx="9966960" cy="3383280"/>
-          </a:xfrm>
-          <a:prstGeom prst="rect">
-            <a:avLst/>
-          </a:prstGeom>
-          <a:noFill/>
-        </p:spPr>
-        <p:txBody>
-          <a:bodyPr wrap="square" anchor="ctr" lIns="0" rIns="0" tIns="0" bIns="0">
-            <a:noAutofit/>
-          </a:bodyPr>
-          <a:lstStyle/>
-          <a:p>
-            <a:pPr>
-              <a:lnSpc>
-                <a:spcPct val="130000"/>
-              </a:lnSpc>
-            </a:pPr>
-            <a:r>
-              <a:rPr sz="2500" b="0" i="1">
-                <a:solidFill>
-                  <a:srgbClr val="3D6D7E"/>
-                </a:solidFill>
-                <a:latin typeface="Georgia"/>
-              </a:rPr>
-              <a:t>"Standard movement rules" is invisible to a reviewer who shares the author's fluency — for the identical reason the author didn't notice writing it.</a:t>
-            </a:r>
-          </a:p>
-        </p:txBody>
-      </p:sp>
-      <p:sp>
-        <p:nvSpPr>
-          <p:cNvPr id="6" name="TextBox 5"/>
-          <p:cNvSpPr txBox="1"/>
-          <p:nvPr/>
-        </p:nvSpPr>
-        <p:spPr>
-          <a:xfrm>
-            <a:off x="960120" y="5074920"/>
-            <a:ext cx="9966960" cy="1005840"/>
+            <a:off x="640080" y="713232"/>
+            <a:ext cx="10881360" cy="1371600"/>
           </a:xfrm>
           <a:prstGeom prst="rect">
             <a:avLst/>
@@ -8545,31 +9184,66 @@
           <a:p>
             <a:pPr>
               <a:lnSpc>
-                <a:spcPct val="125000"/>
+                <a:spcPct val="105000"/>
               </a:lnSpc>
             </a:pPr>
             <a:r>
-              <a:rPr sz="1500" b="0" i="0">
-                <a:solidFill>
-                  <a:srgbClr val="5F636B"/>
-                </a:solidFill>
-                <a:latin typeface="Calibri"/>
-              </a:rPr>
-              <a:t>This class gets a mechanical pre-filter treated as authoritative, on purpose, not just as a backstop: not "judgment usually misses it" but structurally can't catch it, because the fluency that makes a reviewer fast is the same fluency that makes them blind to this one shape of gap.</a:t>
-            </a:r>
-          </a:p>
-        </p:txBody>
-      </p:sp>
-      <p:sp>
-        <p:nvSpPr>
-          <p:cNvPr id="7" name="TextBox 6"/>
+              <a:rPr sz="3200" b="1" i="0">
+                <a:solidFill>
+                  <a:srgbClr val="1C1E22"/>
+                </a:solidFill>
+                <a:latin typeface="Georgia"/>
+              </a:rPr>
+              <a:t>construction-form and bead-size</a:t>
+            </a:r>
+          </a:p>
+        </p:txBody>
+      </p:sp>
+      <p:cxnSp>
+        <p:nvCxnSpPr>
+          <p:cNvPr id="5" name="Connector 4"/>
+          <p:cNvCxnSpPr/>
+          <p:nvPr/>
+        </p:nvCxnSpPr>
+        <p:spPr>
+          <a:xfrm>
+            <a:off x="640080" y="1691640"/>
+            <a:ext cx="10881360" cy="0"/>
+          </a:xfrm>
+          <a:prstGeom prst="line">
+            <a:avLst/>
+          </a:prstGeom>
+          <a:ln w="12700">
+            <a:solidFill>
+              <a:srgbClr val="E2E0DA"/>
+            </a:solidFill>
+          </a:ln>
+        </p:spPr>
+        <p:style>
+          <a:lnRef idx="2">
+            <a:schemeClr val="accent1"/>
+          </a:lnRef>
+          <a:fillRef idx="0">
+            <a:schemeClr val="accent1"/>
+          </a:fillRef>
+          <a:effectRef idx="1">
+            <a:schemeClr val="accent1"/>
+          </a:effectRef>
+          <a:fontRef idx="minor">
+            <a:schemeClr val="tx1"/>
+          </a:fontRef>
+        </p:style>
+      </p:cxnSp>
+      <p:sp>
+        <p:nvSpPr>
+          <p:cNvPr id="6" name="TextBox 5"/>
           <p:cNvSpPr txBox="1"/>
           <p:nvPr/>
         </p:nvSpPr>
         <p:spPr>
           <a:xfrm>
-            <a:off x="640080" y="6473952"/>
-            <a:ext cx="10881360" cy="292608"/>
+            <a:off x="640080" y="1920240"/>
+            <a:ext cx="10881360" cy="4297680"/>
           </a:xfrm>
           <a:prstGeom prst="rect">
             <a:avLst/>
@@ -8582,30 +9256,119 @@
           </a:bodyPr>
           <a:lstStyle/>
           <a:p>
-            <a:pPr algn="l"/>
-            <a:r>
-              <a:rPr sz="1000" b="0" i="0">
-                <a:solidFill>
-                  <a:srgbClr val="5F636B"/>
-                </a:solidFill>
-                <a:latin typeface="Consolas"/>
-              </a:rPr>
-              <a:t>RATCHET · PART 5/6 · DRAFT, CHECK, SIGN OFF</a:t>
-            </a:r>
-          </a:p>
-          <a:p/>
-        </p:txBody>
-      </p:sp>
-      <p:sp>
-        <p:nvSpPr>
-          <p:cNvPr id="8" name="TextBox 7"/>
+            <a:pPr>
+              <a:lnSpc>
+                <a:spcPct val="112000"/>
+              </a:lnSpc>
+              <a:spcAft>
+                <a:spcPts val="1000"/>
+              </a:spcAft>
+            </a:pPr>
+            <a:r>
+              <a:rPr sz="1500" b="1" i="0">
+                <a:solidFill>
+                  <a:srgbClr val="3D6D7E"/>
+                </a:solidFill>
+                <a:latin typeface="Calibri"/>
+              </a:rPr>
+              <a:t>—  </a:t>
+            </a:r>
+            <a:r>
+              <a:rPr sz="1500" b="1" i="0">
+                <a:solidFill>
+                  <a:srgbClr val="1C1E22"/>
+                </a:solidFill>
+                <a:latin typeface="Calibri"/>
+              </a:rPr>
+              <a:t>construction-form </a:t>
+            </a:r>
+            <a:r>
+              <a:rPr sz="1500" b="0" i="0">
+                <a:solidFill>
+                  <a:srgbClr val="1C1E22"/>
+                </a:solidFill>
+                <a:latin typeface="Calibri"/>
+              </a:rPr>
+              <a:t>flags a Cross-Bead Contract that enumerates a polymorphic type's variants without ever saying pointer or value — the exact defect from the expression-VM story, where two independent beads picked opposite constructions of the same undeclared type.</a:t>
+            </a:r>
+          </a:p>
+          <a:p>
+            <a:pPr>
+              <a:lnSpc>
+                <a:spcPct val="112000"/>
+              </a:lnSpc>
+              <a:spcAft>
+                <a:spcPts val="1000"/>
+              </a:spcAft>
+            </a:pPr>
+            <a:r>
+              <a:rPr sz="1500" b="1" i="0">
+                <a:solidFill>
+                  <a:srgbClr val="3D6D7E"/>
+                </a:solidFill>
+                <a:latin typeface="Calibri"/>
+              </a:rPr>
+              <a:t>—  </a:t>
+            </a:r>
+            <a:r>
+              <a:rPr sz="1500" b="1" i="0">
+                <a:solidFill>
+                  <a:srgbClr val="1C1E22"/>
+                </a:solidFill>
+                <a:latin typeface="Calibri"/>
+              </a:rPr>
+              <a:t>bead-size </a:t>
+            </a:r>
+            <a:r>
+              <a:rPr sz="1500" b="0" i="0">
+                <a:solidFill>
+                  <a:srgbClr val="1C1E22"/>
+                </a:solidFill>
+                <a:latin typeface="Calibri"/>
+              </a:rPr>
+              <a:t>flags a Decomposition Notes entry that owns 4 or more functions and is wired into 3 or more prior beads or Cross-Bead Contracts — calibrated against the project's own history until it caught every bead known to have actually spiraled and flagged none known to have run clean.</a:t>
+            </a:r>
+          </a:p>
+          <a:p>
+            <a:pPr>
+              <a:lnSpc>
+                <a:spcPct val="112000"/>
+              </a:lnSpc>
+              <a:spcAft>
+                <a:spcPts val="1000"/>
+              </a:spcAft>
+            </a:pPr>
+            <a:r>
+              <a:rPr sz="1500" b="1" i="0">
+                <a:solidFill>
+                  <a:srgbClr val="3D6D7E"/>
+                </a:solidFill>
+                <a:latin typeface="Calibri"/>
+              </a:rPr>
+              <a:t>—  </a:t>
+            </a:r>
+            <a:r>
+              <a:rPr sz="1500" b="0" i="0">
+                <a:solidFill>
+                  <a:srgbClr val="1C1E22"/>
+                </a:solidFill>
+                <a:latin typeface="Calibri"/>
+              </a:rPr>
+              <a:t>Neither is one of the eighteen catalogued ambiguity classes — they're structural checks living in the same tool, catching a different shape of gap.</a:t>
+            </a:r>
+          </a:p>
+        </p:txBody>
+      </p:sp>
+      <p:sp>
+        <p:nvSpPr>
+          <p:cNvPr id="7" name="TextBox 6"/>
           <p:cNvSpPr txBox="1"/>
           <p:nvPr/>
         </p:nvSpPr>
         <p:spPr>
           <a:xfrm>
-            <a:off x="10881360" y="6473952"/>
-            <a:ext cx="640080" cy="292608"/>
+            <a:off x="640080" y="6473952"/>
+            <a:ext cx="10881360" cy="292608"/>
           </a:xfrm>
           <a:prstGeom prst="rect">
             <a:avLst/>
@@ -8618,6 +9381,42 @@
           </a:bodyPr>
           <a:lstStyle/>
           <a:p>
+            <a:pPr algn="l"/>
+            <a:r>
+              <a:rPr sz="1000" b="0" i="0">
+                <a:solidFill>
+                  <a:srgbClr val="5F636B"/>
+                </a:solidFill>
+                <a:latin typeface="Consolas"/>
+              </a:rPr>
+              <a:t>RATCHET · PART 5/6 · DRAFT, CHECK, SIGN OFF</a:t>
+            </a:r>
+          </a:p>
+          <a:p/>
+        </p:txBody>
+      </p:sp>
+      <p:sp>
+        <p:nvSpPr>
+          <p:cNvPr id="8" name="TextBox 7"/>
+          <p:cNvSpPr txBox="1"/>
+          <p:nvPr/>
+        </p:nvSpPr>
+        <p:spPr>
+          <a:xfrm>
+            <a:off x="10881360" y="6473952"/>
+            <a:ext cx="640080" cy="292608"/>
+          </a:xfrm>
+          <a:prstGeom prst="rect">
+            <a:avLst/>
+          </a:prstGeom>
+          <a:noFill/>
+        </p:spPr>
+        <p:txBody>
+          <a:bodyPr wrap="square" anchor="t" lIns="0" rIns="0" tIns="0" bIns="0">
+            <a:noAutofit/>
+          </a:bodyPr>
+          <a:lstStyle/>
+          <a:p>
             <a:pPr algn="r"/>
             <a:r>
               <a:rPr sz="1000" b="0" i="0">
@@ -8626,7 +9425,7 @@
                 </a:solidFill>
                 <a:latin typeface="Consolas"/>
               </a:rPr>
-              <a:t>08 / 16</a:t>
+              <a:t>08 / 17</a:t>
             </a:r>
           </a:p>
         </p:txBody>
@@ -8699,7 +9498,7 @@
             <a:avLst/>
           </a:prstGeom>
           <a:solidFill>
-            <a:srgbClr val="F6F5F2"/>
+            <a:srgbClr val="F1EFEA"/>
           </a:solidFill>
           <a:ln>
             <a:noFill/>
@@ -8736,7 +9535,7 @@
         </p:nvSpPr>
         <p:spPr>
           <a:xfrm>
-            <a:off x="640080" y="384048"/>
+            <a:off x="640080" y="914400"/>
             <a:ext cx="10881360" cy="320040"/>
           </a:xfrm>
           <a:prstGeom prst="rect">
@@ -8757,21 +9556,104 @@
                 </a:solidFill>
                 <a:latin typeface="Consolas"/>
               </a:rPr>
-              <a:t>CHECK-DESIGN-DOC</a:t>
-            </a:r>
-          </a:p>
-        </p:txBody>
-      </p:sp>
-      <p:sp>
-        <p:nvSpPr>
-          <p:cNvPr id="4" name="TextBox 3"/>
+              <a:t>CLASS 17 — THE ONE JUDGMENT CAN'T CATCH</a:t>
+            </a:r>
+          </a:p>
+        </p:txBody>
+      </p:sp>
+      <p:sp>
+        <p:nvSpPr>
+          <p:cNvPr id="4" name="Rectangle 3"/>
+          <p:cNvSpPr/>
+          <p:nvPr/>
+        </p:nvSpPr>
+        <p:spPr>
+          <a:xfrm>
+            <a:off x="640080" y="1508760"/>
+            <a:ext cx="73152" cy="3291840"/>
+          </a:xfrm>
+          <a:prstGeom prst="rect">
+            <a:avLst/>
+          </a:prstGeom>
+          <a:solidFill>
+            <a:srgbClr val="3D6D7E"/>
+          </a:solidFill>
+          <a:ln>
+            <a:noFill/>
+          </a:ln>
+          <a:effectLst/>
+        </p:spPr>
+        <p:style>
+          <a:lnRef idx="1">
+            <a:schemeClr val="accent1"/>
+          </a:lnRef>
+          <a:fillRef idx="3">
+            <a:schemeClr val="accent1"/>
+          </a:fillRef>
+          <a:effectRef idx="2">
+            <a:schemeClr val="accent1"/>
+          </a:effectRef>
+          <a:fontRef idx="minor">
+            <a:schemeClr val="lt1"/>
+          </a:fontRef>
+        </p:style>
+        <p:txBody>
+          <a:bodyPr rtlCol="0" anchor="ctr"/>
+          <a:lstStyle/>
+          <a:p>
+            <a:pPr algn="ctr"/>
+          </a:p>
+        </p:txBody>
+      </p:sp>
+      <p:sp>
+        <p:nvSpPr>
+          <p:cNvPr id="5" name="TextBox 4"/>
           <p:cNvSpPr txBox="1"/>
           <p:nvPr/>
         </p:nvSpPr>
         <p:spPr>
           <a:xfrm>
-            <a:off x="640080" y="713232"/>
-            <a:ext cx="10881360" cy="1371600"/>
+            <a:off x="960120" y="1463040"/>
+            <a:ext cx="9966960" cy="3383280"/>
+          </a:xfrm>
+          <a:prstGeom prst="rect">
+            <a:avLst/>
+          </a:prstGeom>
+          <a:noFill/>
+        </p:spPr>
+        <p:txBody>
+          <a:bodyPr wrap="square" anchor="ctr" lIns="0" rIns="0" tIns="0" bIns="0">
+            <a:noAutofit/>
+          </a:bodyPr>
+          <a:lstStyle/>
+          <a:p>
+            <a:pPr>
+              <a:lnSpc>
+                <a:spcPct val="130000"/>
+              </a:lnSpc>
+            </a:pPr>
+            <a:r>
+              <a:rPr sz="2500" b="0" i="1">
+                <a:solidFill>
+                  <a:srgbClr val="3D6D7E"/>
+                </a:solidFill>
+                <a:latin typeface="Georgia"/>
+              </a:rPr>
+              <a:t>"Standard movement rules" is invisible to a reviewer who shares the author's fluency — for the identical reason the author didn't notice writing it.</a:t>
+            </a:r>
+          </a:p>
+        </p:txBody>
+      </p:sp>
+      <p:sp>
+        <p:nvSpPr>
+          <p:cNvPr id="6" name="TextBox 5"/>
+          <p:cNvSpPr txBox="1"/>
+          <p:nvPr/>
+        </p:nvSpPr>
+        <p:spPr>
+          <a:xfrm>
+            <a:off x="960120" y="5074920"/>
+            <a:ext cx="9966960" cy="1005840"/>
           </a:xfrm>
           <a:prstGeom prst="rect">
             <a:avLst/>
@@ -8786,66 +9668,31 @@
           <a:p>
             <a:pPr>
               <a:lnSpc>
-                <a:spcPct val="105000"/>
+                <a:spcPct val="125000"/>
               </a:lnSpc>
             </a:pPr>
             <a:r>
-              <a:rPr sz="3200" b="1" i="0">
-                <a:solidFill>
-                  <a:srgbClr val="1C1E22"/>
-                </a:solidFill>
-                <a:latin typeface="Georgia"/>
-              </a:rPr>
-              <a:t>Mirrors DECOMPOSE → AUDIT → RECONCILE, one layer earlier</a:t>
-            </a:r>
-          </a:p>
-        </p:txBody>
-      </p:sp>
-      <p:cxnSp>
-        <p:nvCxnSpPr>
-          <p:cNvPr id="5" name="Connector 4"/>
-          <p:cNvCxnSpPr/>
-          <p:nvPr/>
-        </p:nvCxnSpPr>
-        <p:spPr>
-          <a:xfrm>
-            <a:off x="640080" y="1691640"/>
-            <a:ext cx="10881360" cy="0"/>
-          </a:xfrm>
-          <a:prstGeom prst="line">
-            <a:avLst/>
-          </a:prstGeom>
-          <a:ln w="12700">
-            <a:solidFill>
-              <a:srgbClr val="E2E0DA"/>
-            </a:solidFill>
-          </a:ln>
-        </p:spPr>
-        <p:style>
-          <a:lnRef idx="2">
-            <a:schemeClr val="accent1"/>
-          </a:lnRef>
-          <a:fillRef idx="0">
-            <a:schemeClr val="accent1"/>
-          </a:fillRef>
-          <a:effectRef idx="1">
-            <a:schemeClr val="accent1"/>
-          </a:effectRef>
-          <a:fontRef idx="minor">
-            <a:schemeClr val="tx1"/>
-          </a:fontRef>
-        </p:style>
-      </p:cxnSp>
-      <p:sp>
-        <p:nvSpPr>
-          <p:cNvPr id="6" name="TextBox 5"/>
+              <a:rPr sz="1500" b="0" i="0">
+                <a:solidFill>
+                  <a:srgbClr val="5F636B"/>
+                </a:solidFill>
+                <a:latin typeface="Calibri"/>
+              </a:rPr>
+              <a:t>Every other mechanical class is a cheap first-pass filter alongside a judgment pass that catches what it misses. Class 17 gets the mechanical hit treated as authoritative instead — not "judgment usually misses it" but structurally can't, because the fluency that makes a reviewer fast is the same fluency that makes them blind to a category name standing in for the rule it names.</a:t>
+            </a:r>
+          </a:p>
+        </p:txBody>
+      </p:sp>
+      <p:sp>
+        <p:nvSpPr>
+          <p:cNvPr id="7" name="TextBox 6"/>
           <p:cNvSpPr txBox="1"/>
           <p:nvPr/>
         </p:nvSpPr>
         <p:spPr>
           <a:xfrm>
-            <a:off x="640080" y="1965960"/>
-            <a:ext cx="10881360" cy="4206240"/>
+            <a:off x="640080" y="6473952"/>
+            <a:ext cx="10881360" cy="292608"/>
           </a:xfrm>
           <a:prstGeom prst="rect">
             <a:avLst/>
@@ -8858,101 +9705,30 @@
           </a:bodyPr>
           <a:lstStyle/>
           <a:p>
-            <a:pPr>
-              <a:lnSpc>
-                <a:spcPct val="112000"/>
-              </a:lnSpc>
-              <a:spcAft>
-                <a:spcPts val="1000"/>
-              </a:spcAft>
-            </a:pPr>
-            <a:r>
-              <a:rPr sz="1600" b="1" i="0">
-                <a:solidFill>
-                  <a:srgbClr val="3D6D7E"/>
-                </a:solidFill>
-                <a:latin typeface="Calibri"/>
-              </a:rPr>
-              <a:t>—  </a:t>
-            </a:r>
-            <a:r>
-              <a:rPr sz="1600" b="0" i="0">
-                <a:solidFill>
-                  <a:srgbClr val="1C1E22"/>
-                </a:solidFill>
-                <a:latin typeface="Calibri"/>
-              </a:rPr>
-              <a:t>Runs the mechanical scan first, keeps every path:line hit.</a:t>
-            </a:r>
-          </a:p>
-          <a:p>
-            <a:pPr>
-              <a:lnSpc>
-                <a:spcPct val="112000"/>
-              </a:lnSpc>
-              <a:spcAft>
-                <a:spcPts val="1000"/>
-              </a:spcAft>
-            </a:pPr>
-            <a:r>
-              <a:rPr sz="1600" b="1" i="0">
-                <a:solidFill>
-                  <a:srgbClr val="3D6D7E"/>
-                </a:solidFill>
-                <a:latin typeface="Calibri"/>
-              </a:rPr>
-              <a:t>—  </a:t>
-            </a:r>
-            <a:r>
-              <a:rPr sz="1600" b="0" i="0">
-                <a:solidFill>
-                  <a:srgbClr val="1C1E22"/>
-                </a:solidFill>
-                <a:latin typeface="Calibri"/>
-              </a:rPr>
-              <a:t>Separately dispatches a fresh subagent with nothing but the doc and the current checklist — not the mechanical report, not who wrote the doc or why. Feeding the mechanical hits in first would anchor its judgment and defeat the point of a second, independent pass.</a:t>
-            </a:r>
-          </a:p>
-          <a:p>
-            <a:pPr>
-              <a:lnSpc>
-                <a:spcPct val="112000"/>
-              </a:lnSpc>
-              <a:spcAft>
-                <a:spcPts val="1000"/>
-              </a:spcAft>
-            </a:pPr>
-            <a:r>
-              <a:rPr sz="1600" b="1" i="0">
-                <a:solidFill>
-                  <a:srgbClr val="3D6D7E"/>
-                </a:solidFill>
-                <a:latin typeface="Calibri"/>
-              </a:rPr>
-              <a:t>—  </a:t>
-            </a:r>
-            <a:r>
-              <a:rPr sz="1600" b="0" i="0">
-                <a:solidFill>
-                  <a:srgbClr val="1C1E22"/>
-                </a:solidFill>
-                <a:latin typeface="Calibri"/>
-              </a:rPr>
-              <a:t>The subagent is explicitly told that finding nothing is an acceptable result — manufacturing findings to look thorough is its own kind of failure.</a:t>
-            </a:r>
-          </a:p>
-        </p:txBody>
-      </p:sp>
-      <p:sp>
-        <p:nvSpPr>
-          <p:cNvPr id="7" name="TextBox 6"/>
+            <a:pPr algn="l"/>
+            <a:r>
+              <a:rPr sz="1000" b="0" i="0">
+                <a:solidFill>
+                  <a:srgbClr val="5F636B"/>
+                </a:solidFill>
+                <a:latin typeface="Consolas"/>
+              </a:rPr>
+              <a:t>RATCHET · PART 5/6 · DRAFT, CHECK, SIGN OFF</a:t>
+            </a:r>
+          </a:p>
+          <a:p/>
+        </p:txBody>
+      </p:sp>
+      <p:sp>
+        <p:nvSpPr>
+          <p:cNvPr id="8" name="TextBox 7"/>
           <p:cNvSpPr txBox="1"/>
           <p:nvPr/>
         </p:nvSpPr>
         <p:spPr>
           <a:xfrm>
-            <a:off x="640080" y="6473952"/>
-            <a:ext cx="10881360" cy="292608"/>
+            <a:off x="10881360" y="6473952"/>
+            <a:ext cx="640080" cy="292608"/>
           </a:xfrm>
           <a:prstGeom prst="rect">
             <a:avLst/>
@@ -8965,7 +9741,7 @@
           </a:bodyPr>
           <a:lstStyle/>
           <a:p>
-            <a:pPr algn="l"/>
+            <a:pPr algn="r"/>
             <a:r>
               <a:rPr sz="1000" b="0" i="0">
                 <a:solidFill>
@@ -8973,43 +9749,7 @@
                 </a:solidFill>
                 <a:latin typeface="Consolas"/>
               </a:rPr>
-              <a:t>RATCHET · PART 5/6 · DRAFT, CHECK, SIGN OFF</a:t>
-            </a:r>
-          </a:p>
-          <a:p/>
-        </p:txBody>
-      </p:sp>
-      <p:sp>
-        <p:nvSpPr>
-          <p:cNvPr id="8" name="TextBox 7"/>
-          <p:cNvSpPr txBox="1"/>
-          <p:nvPr/>
-        </p:nvSpPr>
-        <p:spPr>
-          <a:xfrm>
-            <a:off x="10881360" y="6473952"/>
-            <a:ext cx="640080" cy="292608"/>
-          </a:xfrm>
-          <a:prstGeom prst="rect">
-            <a:avLst/>
-          </a:prstGeom>
-          <a:noFill/>
-        </p:spPr>
-        <p:txBody>
-          <a:bodyPr wrap="square" anchor="t" lIns="0" rIns="0" tIns="0" bIns="0">
-            <a:noAutofit/>
-          </a:bodyPr>
-          <a:lstStyle/>
-          <a:p>
-            <a:pPr algn="r"/>
-            <a:r>
-              <a:rPr sz="1000" b="0" i="0">
-                <a:solidFill>
-                  <a:srgbClr val="5F636B"/>
-                </a:solidFill>
-                <a:latin typeface="Consolas"/>
-              </a:rPr>
-              <a:t>09 / 16</a:t>
+              <a:t>09 / 17</a:t>
             </a:r>
           </a:p>
         </p:txBody>
